--- a/sjoskolan/vecka-45/aktuell/v45_03_Repetition_infor_tentamen_elev.pptx
+++ b/sjoskolan/vecka-45/aktuell/v45_03_Repetition_infor_tentamen_elev.pptx
@@ -4978,7 +4978,7 @@
         <p:spPr>
           <a:xfrm xmlns:a="http://schemas.openxmlformats.org/drawingml/2006/main">
             <a:off x="762000" y="2533650"/>
-            <a:ext cx="7620000" cy="2286000"/>
+            <a:ext cx="3886200" cy="2606040"/>
           </a:xfrm>
           <a:prstGeom xmlns:a="http://schemas.openxmlformats.org/drawingml/2006/main" prst="rect">
             <a:avLst/>
@@ -5014,7 +5014,7 @@
                 <a:ea typeface="Calibri"/>
                 <a:cs typeface="Calibri"/>
               </a:rPr>
-              <a:t>4,0 A och 1,5 A går in i en nod. 2,0 A och Iₓ går ut. Bestäm Iₓ.</a:t>
+              <a:t>4,0 A och 1,5 A går in i en nod. 2,0 A och Iₓ går ut. Bestäm Iₓ.</a:t>
             </a:r>
           </a:p>
         </p:txBody>
@@ -5135,6 +5135,30 @@
           </a:p>
         </p:txBody>
       </p:sp>
+      <p:pic xmlns:a="http://schemas.openxmlformats.org/drawingml/2006/main" xmlns:r="http://schemas.openxmlformats.org/officeDocument/2006/relationships">
+        <p:nvPicPr>
+          <p:cNvPr id="9" name="Figur: Nod med 4,0 A och 1,5 A in samt 2,0 A oc" descr="Nod med 4,0 A och 1,5 A in samt 2,0 A och Ix ut; Ix okänd"/>
+          <p:cNvPicPr>
+            <a:picLocks noChangeAspect="1"/>
+          </p:cNvPicPr>
+          <p:nvPr/>
+        </p:nvPicPr>
+        <p:blipFill>
+          <a:blip r:embed="rId3"/>
+          <a:stretch>
+            <a:fillRect/>
+          </a:stretch>
+        </p:blipFill>
+        <p:spPr>
+          <a:xfrm>
+            <a:off x="4846320" y="2331720"/>
+            <a:ext cx="3931920" cy="2557763"/>
+          </a:xfrm>
+          <a:prstGeom prst="rect">
+            <a:avLst/>
+          </a:prstGeom>
+        </p:spPr>
+      </p:pic>
     </p:spTree>
     <p:extLst>
       <p:ext uri="{BB962C8B-B14F-4D97-AF65-F5344CB8AC3E}">
@@ -5290,7 +5314,62 @@
                 <a:ea typeface="Calibri"/>
                 <a:cs typeface="Calibri"/>
               </a:rPr>
-              <a:t>Rp = R₂Rlast/(R₂ + Rlast)</a:t>
+              <a:t>R</a:t>
+            </a:r>
+            <a:r>
+              <a:rPr sz="2400" b="1" baseline="-25000">
+                <a:solidFill>
+                  <a:srgbClr val="064F91"/>
+                </a:solidFill>
+                <a:latin typeface="Calibri"/>
+                <a:ea typeface="Calibri"/>
+                <a:cs typeface="Calibri"/>
+              </a:rPr>
+              <a:t>p</a:t>
+            </a:r>
+            <a:r>
+              <a:rPr sz="2400" b="1">
+                <a:solidFill>
+                  <a:srgbClr val="064F91"/>
+                </a:solidFill>
+                <a:latin typeface="Calibri"/>
+                <a:ea typeface="Calibri"/>
+                <a:cs typeface="Calibri"/>
+              </a:rPr>
+              <a:t> = R₂Rlast/(R₂ + </a:t>
+            </a:r>
+            <a:r>
+              <a:rPr sz="2400" b="1">
+                <a:solidFill>
+                  <a:srgbClr val="064F91"/>
+                </a:solidFill>
+                <a:latin typeface="Calibri"/>
+                <a:ea typeface="Calibri"/>
+                <a:cs typeface="Calibri"/>
+              </a:rPr>
+              <a:t>R</a:t>
+            </a:r>
+            <a:r>
+              <a:rPr sz="2400" b="1" baseline="-25000">
+                <a:solidFill>
+                  <a:srgbClr val="064F91"/>
+                </a:solidFill>
+                <a:latin typeface="Calibri"/>
+                <a:ea typeface="Calibri"/>
+                <a:cs typeface="Calibri"/>
+              </a:rPr>
+              <a:t>last</a:t>
+            </a:r>
+            <a:r>
+              <a:rPr sz="2400" b="1">
+                <a:solidFill>
+                  <a:srgbClr val="064F91"/>
+                </a:solidFill>
+                <a:latin typeface="Calibri"/>
+                <a:ea typeface="Calibri"/>
+                <a:cs typeface="Calibri"/>
+              </a:rPr>
+              <a:t>)</a:t>
             </a:r>
           </a:p>
           <a:p xmlns:a="http://schemas.openxmlformats.org/drawingml/2006/main">
@@ -5313,7 +5392,128 @@
                 <a:ea typeface="Calibri"/>
                 <a:cs typeface="Calibri"/>
               </a:rPr>
-              <a:t>Uut = Uin · Rp/(R₁ + Rp)</a:t>
+              <a:t>U</a:t>
+            </a:r>
+            <a:r>
+              <a:rPr sz="2400" b="1" baseline="-25000">
+                <a:solidFill>
+                  <a:srgbClr val="064F91"/>
+                </a:solidFill>
+                <a:latin typeface="Calibri"/>
+                <a:ea typeface="Calibri"/>
+                <a:cs typeface="Calibri"/>
+              </a:rPr>
+              <a:t>ut</a:t>
+            </a:r>
+            <a:r>
+              <a:rPr sz="2400" b="1">
+                <a:solidFill>
+                  <a:srgbClr val="064F91"/>
+                </a:solidFill>
+                <a:latin typeface="Calibri"/>
+                <a:ea typeface="Calibri"/>
+                <a:cs typeface="Calibri"/>
+              </a:rPr>
+              <a:t> = </a:t>
+            </a:r>
+            <a:r>
+              <a:rPr sz="2400" b="1">
+                <a:solidFill>
+                  <a:srgbClr val="064F91"/>
+                </a:solidFill>
+                <a:latin typeface="Calibri"/>
+                <a:ea typeface="Calibri"/>
+                <a:cs typeface="Calibri"/>
+              </a:rPr>
+              <a:t>U</a:t>
+            </a:r>
+            <a:r>
+              <a:rPr sz="2400" b="1" baseline="-25000">
+                <a:solidFill>
+                  <a:srgbClr val="064F91"/>
+                </a:solidFill>
+                <a:latin typeface="Calibri"/>
+                <a:ea typeface="Calibri"/>
+                <a:cs typeface="Calibri"/>
+              </a:rPr>
+              <a:t>in</a:t>
+            </a:r>
+            <a:r>
+              <a:rPr sz="2400" b="1">
+                <a:solidFill>
+                  <a:srgbClr val="064F91"/>
+                </a:solidFill>
+                <a:latin typeface="Calibri"/>
+                <a:ea typeface="Calibri"/>
+                <a:cs typeface="Calibri"/>
+              </a:rPr>
+              <a:t> · </a:t>
+            </a:r>
+            <a:r>
+              <a:rPr sz="2400" b="1">
+                <a:solidFill>
+                  <a:srgbClr val="064F91"/>
+                </a:solidFill>
+                <a:latin typeface="Calibri"/>
+                <a:ea typeface="Calibri"/>
+                <a:cs typeface="Calibri"/>
+              </a:rPr>
+              <a:t>R</a:t>
+            </a:r>
+            <a:r>
+              <a:rPr sz="2400" b="1" baseline="-25000">
+                <a:solidFill>
+                  <a:srgbClr val="064F91"/>
+                </a:solidFill>
+                <a:latin typeface="Calibri"/>
+                <a:ea typeface="Calibri"/>
+                <a:cs typeface="Calibri"/>
+              </a:rPr>
+              <a:t>p</a:t>
+            </a:r>
+            <a:r>
+              <a:rPr sz="2400" b="1">
+                <a:solidFill>
+                  <a:srgbClr val="064F91"/>
+                </a:solidFill>
+                <a:latin typeface="Calibri"/>
+                <a:ea typeface="Calibri"/>
+                <a:cs typeface="Calibri"/>
+              </a:rPr>
+              <a:t>/(R₁ + </a:t>
+            </a:r>
+            <a:r>
+              <a:rPr sz="2400" b="1">
+                <a:solidFill>
+                  <a:srgbClr val="064F91"/>
+                </a:solidFill>
+                <a:latin typeface="Calibri"/>
+                <a:ea typeface="Calibri"/>
+                <a:cs typeface="Calibri"/>
+              </a:rPr>
+              <a:t>R</a:t>
+            </a:r>
+            <a:r>
+              <a:rPr sz="2400" b="1" baseline="-25000">
+                <a:solidFill>
+                  <a:srgbClr val="064F91"/>
+                </a:solidFill>
+                <a:latin typeface="Calibri"/>
+                <a:ea typeface="Calibri"/>
+                <a:cs typeface="Calibri"/>
+              </a:rPr>
+              <a:t>p</a:t>
+            </a:r>
+            <a:r>
+              <a:rPr sz="2400" b="1">
+                <a:solidFill>
+                  <a:srgbClr val="064F91"/>
+                </a:solidFill>
+                <a:latin typeface="Calibri"/>
+                <a:ea typeface="Calibri"/>
+                <a:cs typeface="Calibri"/>
+              </a:rPr>
+              <a:t>)</a:t>
             </a:r>
           </a:p>
         </p:txBody>
@@ -5370,7 +5570,29 @@
                 <a:ea typeface="Calibri"/>
                 <a:cs typeface="Calibri"/>
               </a:rPr>
-              <a:t>Rp ersätter den nedre resistorn parallellt med lasten. Resistansenheten måste vara gemensam.</a:t>
+              <a:t>R</a:t>
+            </a:r>
+            <a:r>
+              <a:rPr sz="2100" b="0" baseline="-25000">
+                <a:solidFill>
+                  <a:srgbClr val="111111"/>
+                </a:solidFill>
+                <a:latin typeface="Calibri"/>
+                <a:ea typeface="Calibri"/>
+                <a:cs typeface="Calibri"/>
+              </a:rPr>
+              <a:t>p</a:t>
+            </a:r>
+            <a:r>
+              <a:rPr sz="2100" b="0">
+                <a:solidFill>
+                  <a:srgbClr val="111111"/>
+                </a:solidFill>
+                <a:latin typeface="Calibri"/>
+                <a:ea typeface="Calibri"/>
+                <a:cs typeface="Calibri"/>
+              </a:rPr>
+              <a:t> ersätter den nedre resistorn parallellt med lasten. Resistansenheten måste vara gemensam.</a:t>
             </a:r>
           </a:p>
         </p:txBody>
@@ -5427,7 +5649,73 @@
                 <a:ea typeface="Calibri"/>
                 <a:cs typeface="Calibri"/>
               </a:rPr>
-              <a:t>Förutsättningar: Uin = 24 V, R₁ = 2 kΩ, R₂ = Rlast = 4 kΩ. Ideal källa och ohmska resistorer.</a:t>
+              <a:t>Förutsättningar: </a:t>
+            </a:r>
+            <a:r>
+              <a:rPr sz="2025" b="0">
+                <a:solidFill>
+                  <a:srgbClr val="111111"/>
+                </a:solidFill>
+                <a:latin typeface="Calibri"/>
+                <a:ea typeface="Calibri"/>
+                <a:cs typeface="Calibri"/>
+              </a:rPr>
+              <a:t>U</a:t>
+            </a:r>
+            <a:r>
+              <a:rPr sz="2025" b="0" baseline="-25000">
+                <a:solidFill>
+                  <a:srgbClr val="111111"/>
+                </a:solidFill>
+                <a:latin typeface="Calibri"/>
+                <a:ea typeface="Calibri"/>
+                <a:cs typeface="Calibri"/>
+              </a:rPr>
+              <a:t>in</a:t>
+            </a:r>
+            <a:r>
+              <a:rPr sz="2025" b="0">
+                <a:solidFill>
+                  <a:srgbClr val="111111"/>
+                </a:solidFill>
+                <a:latin typeface="Calibri"/>
+                <a:ea typeface="Calibri"/>
+                <a:cs typeface="Calibri"/>
+              </a:rPr>
+              <a:t> = 24 V, R₁ = 2 kΩ, R₂ = </a:t>
+            </a:r>
+            <a:r>
+              <a:rPr sz="2025" b="0">
+                <a:solidFill>
+                  <a:srgbClr val="111111"/>
+                </a:solidFill>
+                <a:latin typeface="Calibri"/>
+                <a:ea typeface="Calibri"/>
+                <a:cs typeface="Calibri"/>
+              </a:rPr>
+              <a:t>R</a:t>
+            </a:r>
+            <a:r>
+              <a:rPr sz="2025" b="0" baseline="-25000">
+                <a:solidFill>
+                  <a:srgbClr val="111111"/>
+                </a:solidFill>
+                <a:latin typeface="Calibri"/>
+                <a:ea typeface="Calibri"/>
+                <a:cs typeface="Calibri"/>
+              </a:rPr>
+              <a:t>last</a:t>
+            </a:r>
+            <a:r>
+              <a:rPr sz="2025" b="0">
+                <a:solidFill>
+                  <a:srgbClr val="111111"/>
+                </a:solidFill>
+                <a:latin typeface="Calibri"/>
+                <a:ea typeface="Calibri"/>
+                <a:cs typeface="Calibri"/>
+              </a:rPr>
+              <a:t> = 4 kΩ. Ideal källa och ohmska resistorer.</a:t>
             </a:r>
           </a:p>
         </p:txBody>
@@ -5725,7 +6013,7 @@
         <p:spPr>
           <a:xfrm xmlns:a="http://schemas.openxmlformats.org/drawingml/2006/main">
             <a:off x="762000" y="2533650"/>
-            <a:ext cx="7620000" cy="2286000"/>
+            <a:ext cx="3886200" cy="2606040"/>
           </a:xfrm>
           <a:prstGeom xmlns:a="http://schemas.openxmlformats.org/drawingml/2006/main" prst="rect">
             <a:avLst/>
@@ -5761,7 +6049,7 @@
                 <a:ea typeface="Calibri"/>
                 <a:cs typeface="Calibri"/>
               </a:rPr>
-              <a:t>24 V matar R₁ = 2 kΩ och R₂ = 4 kΩ i serie. En last på 4 kΩ ligger parallellt med R₂. Beräkna utspänningen.</a:t>
+              <a:t>24 V matar R₁ = 2 kΩ och R₂ = 4 kΩ i serie. En last på 4 kΩ ligger parallellt med R₂. Beräkna utspänningen.</a:t>
             </a:r>
           </a:p>
         </p:txBody>
@@ -5882,6 +6170,30 @@
           </a:p>
         </p:txBody>
       </p:sp>
+      <p:pic xmlns:a="http://schemas.openxmlformats.org/drawingml/2006/main" xmlns:r="http://schemas.openxmlformats.org/officeDocument/2006/relationships">
+        <p:nvPicPr>
+          <p:cNvPr id="9" name="Figur: Spänningsdelare: 24 V över R1 = 2 kilohm" descr="Spänningsdelare: 24 V över R1 = 2 kilohm och R2 = 4 kilohm med en last på 4 kilohm; utspänningen okänd"/>
+          <p:cNvPicPr>
+            <a:picLocks noChangeAspect="1"/>
+          </p:cNvPicPr>
+          <p:nvPr/>
+        </p:nvPicPr>
+        <p:blipFill>
+          <a:blip r:embed="rId3"/>
+          <a:stretch>
+            <a:fillRect/>
+          </a:stretch>
+        </p:blipFill>
+        <p:spPr>
+          <a:xfrm>
+            <a:off x="4846320" y="2331720"/>
+            <a:ext cx="3931920" cy="2740984"/>
+          </a:xfrm>
+          <a:prstGeom prst="rect">
+            <a:avLst/>
+          </a:prstGeom>
+        </p:spPr>
+      </p:pic>
     </p:spTree>
     <p:extLst>
       <p:ext uri="{BB962C8B-B14F-4D97-AF65-F5344CB8AC3E}">
@@ -6037,7 +6349,40 @@
                 <a:ea typeface="Calibri"/>
                 <a:cs typeface="Calibri"/>
               </a:rPr>
-              <a:t>û = √2 · Urms     T = 1/f</a:t>
+              <a:t>û = √2 · </a:t>
+            </a:r>
+            <a:r>
+              <a:rPr sz="2400" b="1">
+                <a:solidFill>
+                  <a:srgbClr val="064F91"/>
+                </a:solidFill>
+                <a:latin typeface="Calibri"/>
+                <a:ea typeface="Calibri"/>
+                <a:cs typeface="Calibri"/>
+              </a:rPr>
+              <a:t>U</a:t>
+            </a:r>
+            <a:r>
+              <a:rPr sz="2400" b="1" baseline="-25000">
+                <a:solidFill>
+                  <a:srgbClr val="064F91"/>
+                </a:solidFill>
+                <a:latin typeface="Calibri"/>
+                <a:ea typeface="Calibri"/>
+                <a:cs typeface="Calibri"/>
+              </a:rPr>
+              <a:t>rms</a:t>
+            </a:r>
+            <a:r>
+              <a:rPr sz="2400" b="1">
+                <a:solidFill>
+                  <a:srgbClr val="064F91"/>
+                </a:solidFill>
+                <a:latin typeface="Calibri"/>
+                <a:ea typeface="Calibri"/>
+                <a:cs typeface="Calibri"/>
+              </a:rPr>
+              <a:t>     T = 1/f</a:t>
             </a:r>
           </a:p>
         </p:txBody>
@@ -6151,7 +6496,40 @@
                 <a:ea typeface="Calibri"/>
                 <a:cs typeface="Calibri"/>
               </a:rPr>
-              <a:t>Förutsättningar: Ren sinus utan DC-komponent, Urms = 24 V och f = 60 Hz.</a:t>
+              <a:t>Förutsättningar: Ren sinus utan DC-komponent, </a:t>
+            </a:r>
+            <a:r>
+              <a:rPr sz="2025" b="0">
+                <a:solidFill>
+                  <a:srgbClr val="111111"/>
+                </a:solidFill>
+                <a:latin typeface="Calibri"/>
+                <a:ea typeface="Calibri"/>
+                <a:cs typeface="Calibri"/>
+              </a:rPr>
+              <a:t>U</a:t>
+            </a:r>
+            <a:r>
+              <a:rPr sz="2025" b="0" baseline="-25000">
+                <a:solidFill>
+                  <a:srgbClr val="111111"/>
+                </a:solidFill>
+                <a:latin typeface="Calibri"/>
+                <a:ea typeface="Calibri"/>
+                <a:cs typeface="Calibri"/>
+              </a:rPr>
+              <a:t>rms</a:t>
+            </a:r>
+            <a:r>
+              <a:rPr sz="2025" b="0">
+                <a:solidFill>
+                  <a:srgbClr val="111111"/>
+                </a:solidFill>
+                <a:latin typeface="Calibri"/>
+                <a:ea typeface="Calibri"/>
+                <a:cs typeface="Calibri"/>
+              </a:rPr>
+              <a:t> = 24 V och f = 60 Hz.</a:t>
             </a:r>
           </a:p>
         </p:txBody>
@@ -6711,7 +7089,7 @@
       </p:sp>
       <p:sp>
         <p:nvSpPr>
-          <p:cNvPr id="10" name="|Z| = √(R² + Xᴸ²)&#10;I = U/|Z|     cos φ = R/|Z|">
+          <p:cNvPr id="10" name="|Z| = √(R² + XL²)&#10;I = U/|Z|     cos φ = R/|Z|">
             <a:extLst xmlns:a="http://schemas.openxmlformats.org/drawingml/2006/main">
               <a:ext uri="{FF2B5EF4-FFF2-40B4-BE49-F238E27FC236}">
                 <a16:creationId xmlns:a16="http://schemas.microsoft.com/office/drawing/2014/main" id="{17D4DF14-9565-4902-B80F-18B4CA880DFC}"/>
@@ -6761,7 +7139,29 @@
                 <a:ea typeface="Calibri"/>
                 <a:cs typeface="Calibri"/>
               </a:rPr>
-              <a:t>|Z| = √(R² + Xᴸ²)</a:t>
+              <a:t>|Z| = √(R² + X</a:t>
+            </a:r>
+            <a:r>
+              <a:rPr sz="2400" b="1" baseline="-25000">
+                <a:solidFill>
+                  <a:srgbClr val="064F91"/>
+                </a:solidFill>
+                <a:latin typeface="Calibri"/>
+                <a:ea typeface="Calibri"/>
+                <a:cs typeface="Calibri"/>
+              </a:rPr>
+              <a:t>L</a:t>
+            </a:r>
+            <a:r>
+              <a:rPr sz="2400" b="1">
+                <a:solidFill>
+                  <a:srgbClr val="064F91"/>
+                </a:solidFill>
+                <a:latin typeface="Calibri"/>
+                <a:ea typeface="Calibri"/>
+                <a:cs typeface="Calibri"/>
+              </a:rPr>
+              <a:t>²)</a:t>
             </a:r>
           </a:p>
           <a:p xmlns:a="http://schemas.openxmlformats.org/drawingml/2006/main">
@@ -6791,7 +7191,7 @@
       </p:sp>
       <p:sp>
         <p:nvSpPr>
-          <p:cNvPr id="11" name="R är resistiv del och Xᴸ induktiv del av serieimpedansen. U och I">
+          <p:cNvPr id="11" name="R är resistiv del och XL induktiv del av serieimpedansen. U och I">
             <a:extLst xmlns:a="http://schemas.openxmlformats.org/drawingml/2006/main">
               <a:ext uri="{FF2B5EF4-FFF2-40B4-BE49-F238E27FC236}">
                 <a16:creationId xmlns:a16="http://schemas.microsoft.com/office/drawing/2014/main" id="{93836713-1634-496F-89B8-8689E54C2EE8}"/>
@@ -6841,14 +7241,36 @@
                 <a:ea typeface="Calibri"/>
                 <a:cs typeface="Calibri"/>
               </a:rPr>
-              <a:t>R är resistiv del och Xᴸ induktiv del av serieimpedansen. U och I anges som RMS.</a:t>
-            </a:r>
-          </a:p>
-        </p:txBody>
-      </p:sp>
-      <p:sp>
-        <p:nvSpPr>
-          <p:cNvPr id="12" name="Förutsättningar: Serie-RL: R = 30 Ω, Xᴸ = 40 Ω och U = 100 V RMS.">
+              <a:t>R är resistiv del och X</a:t>
+            </a:r>
+            <a:r>
+              <a:rPr sz="2100" b="0" baseline="-25000">
+                <a:solidFill>
+                  <a:srgbClr val="111111"/>
+                </a:solidFill>
+                <a:latin typeface="Calibri"/>
+                <a:ea typeface="Calibri"/>
+                <a:cs typeface="Calibri"/>
+              </a:rPr>
+              <a:t>L</a:t>
+            </a:r>
+            <a:r>
+              <a:rPr sz="2100" b="0">
+                <a:solidFill>
+                  <a:srgbClr val="111111"/>
+                </a:solidFill>
+                <a:latin typeface="Calibri"/>
+                <a:ea typeface="Calibri"/>
+                <a:cs typeface="Calibri"/>
+              </a:rPr>
+              <a:t> induktiv del av serieimpedansen. U och I anges som RMS.</a:t>
+            </a:r>
+          </a:p>
+        </p:txBody>
+      </p:sp>
+      <p:sp>
+        <p:nvSpPr>
+          <p:cNvPr id="12" name="Förutsättningar: Serie-RL: R = 30 Ω, XL = 40 Ω och U = 100 V RMS.">
             <a:extLst xmlns:a="http://schemas.openxmlformats.org/drawingml/2006/main">
               <a:ext uri="{FF2B5EF4-FFF2-40B4-BE49-F238E27FC236}">
                 <a16:creationId xmlns:a16="http://schemas.microsoft.com/office/drawing/2014/main" id="{78F67898-F42A-4031-9CA0-9019D7A068A1}"/>
@@ -6898,7 +7320,29 @@
                 <a:ea typeface="Calibri"/>
                 <a:cs typeface="Calibri"/>
               </a:rPr>
-              <a:t>Förutsättningar: Serie-RL: R = 30 Ω, Xᴸ = 40 Ω och U = 100 V RMS.</a:t>
+              <a:t>Förutsättningar: Serie-RL: R = 30 Ω, X</a:t>
+            </a:r>
+            <a:r>
+              <a:rPr sz="2025" b="0" baseline="-25000">
+                <a:solidFill>
+                  <a:srgbClr val="111111"/>
+                </a:solidFill>
+                <a:latin typeface="Calibri"/>
+                <a:ea typeface="Calibri"/>
+                <a:cs typeface="Calibri"/>
+              </a:rPr>
+              <a:t>L</a:t>
+            </a:r>
+            <a:r>
+              <a:rPr sz="2025" b="0">
+                <a:solidFill>
+                  <a:srgbClr val="111111"/>
+                </a:solidFill>
+                <a:latin typeface="Calibri"/>
+                <a:ea typeface="Calibri"/>
+                <a:cs typeface="Calibri"/>
+              </a:rPr>
+              <a:t> = 40 Ω och U = 100 V RMS.</a:t>
             </a:r>
           </a:p>
         </p:txBody>
@@ -7181,7 +7625,7 @@
       </p:sp>
       <p:sp>
         <p:nvSpPr>
-          <p:cNvPr id="4" name="R = 30 Ω och Xᴸ = 40 Ω i serie över 100 V RMS. Bestäm I och cos φ">
+          <p:cNvPr id="4" name="R = 30 Ω och XL = 40 Ω i serie över 100 V RMS. Bestäm I och cos φ">
             <a:extLst xmlns:a="http://schemas.openxmlformats.org/drawingml/2006/main">
               <a:ext uri="{FF2B5EF4-FFF2-40B4-BE49-F238E27FC236}">
                 <a16:creationId xmlns:a16="http://schemas.microsoft.com/office/drawing/2014/main" id="{A3E165A5-0559-42A0-9D07-917FE508399F}"/>
@@ -7196,7 +7640,7 @@
         <p:spPr>
           <a:xfrm xmlns:a="http://schemas.openxmlformats.org/drawingml/2006/main">
             <a:off x="762000" y="2533650"/>
-            <a:ext cx="7620000" cy="2286000"/>
+            <a:ext cx="3886200" cy="2606040"/>
           </a:xfrm>
           <a:prstGeom xmlns:a="http://schemas.openxmlformats.org/drawingml/2006/main" prst="rect">
             <a:avLst/>
@@ -7232,7 +7676,29 @@
                 <a:ea typeface="Calibri"/>
                 <a:cs typeface="Calibri"/>
               </a:rPr>
-              <a:t>R = 30 Ω och Xᴸ = 40 Ω i serie över 100 V RMS. Bestäm I och cos φ.</a:t>
+              <a:t>R = 30 Ω och X</a:t>
+            </a:r>
+            <a:r>
+              <a:rPr sz="2400" b="0" baseline="-25000">
+                <a:solidFill>
+                  <a:srgbClr val="111111"/>
+                </a:solidFill>
+                <a:latin typeface="Calibri"/>
+                <a:ea typeface="Calibri"/>
+                <a:cs typeface="Calibri"/>
+              </a:rPr>
+              <a:t>L</a:t>
+            </a:r>
+            <a:r>
+              <a:rPr sz="2400" b="0">
+                <a:solidFill>
+                  <a:srgbClr val="111111"/>
+                </a:solidFill>
+                <a:latin typeface="Calibri"/>
+                <a:ea typeface="Calibri"/>
+                <a:cs typeface="Calibri"/>
+              </a:rPr>
+              <a:t> = 40 Ω i serie över 100 V RMS. Bestäm I och cos φ.</a:t>
             </a:r>
           </a:p>
         </p:txBody>
@@ -7353,6 +7819,30 @@
           </a:p>
         </p:txBody>
       </p:sp>
+      <p:pic xmlns:a="http://schemas.openxmlformats.org/drawingml/2006/main" xmlns:r="http://schemas.openxmlformats.org/officeDocument/2006/relationships">
+        <p:nvPicPr>
+          <p:cNvPr id="9" name="Figur: Serie-RL med R = 30 ohm och XL = 40 ohm " descr="Serie-RL med R = 30 ohm och XL = 40 ohm vid 100 V RMS; ström och effektfaktor okända"/>
+          <p:cNvPicPr>
+            <a:picLocks noChangeAspect="1"/>
+          </p:cNvPicPr>
+          <p:nvPr/>
+        </p:nvPicPr>
+        <p:blipFill>
+          <a:blip r:embed="rId3"/>
+          <a:stretch>
+            <a:fillRect/>
+          </a:stretch>
+        </p:blipFill>
+        <p:spPr>
+          <a:xfrm>
+            <a:off x="4846320" y="2331720"/>
+            <a:ext cx="3931920" cy="2557763"/>
+          </a:xfrm>
+          <a:prstGeom prst="rect">
+            <a:avLst/>
+          </a:prstGeom>
+        </p:spPr>
+      </p:pic>
     </p:spTree>
     <p:extLst>
       <p:ext uri="{BB962C8B-B14F-4D97-AF65-F5344CB8AC3E}">
@@ -9404,7 +9894,7 @@
                 <a:ea typeface="Calibri"/>
                 <a:cs typeface="Calibri"/>
               </a:rPr>
-              <a:t>Källan håller 12 V. Vid 2 A får lasten 10 V före och 11,8 V efter åtgärd.</a:t>
+              <a:t>Källan håller 12 V. Vid 3 A får lasten 10,5 V före och 11,85 V efter åtgärd.</a:t>
             </a:r>
           </a:p>
         </p:txBody>
@@ -9461,7 +9951,95 @@
                 <a:ea typeface="Calibri"/>
                 <a:cs typeface="Calibri"/>
               </a:rPr>
-              <a:t>Rslinga = (Ukälla − Ulast)/I</a:t>
+              <a:t>R</a:t>
+            </a:r>
+            <a:r>
+              <a:rPr sz="2325" b="1" baseline="-25000">
+                <a:solidFill>
+                  <a:srgbClr val="064F91"/>
+                </a:solidFill>
+                <a:latin typeface="Calibri"/>
+                <a:ea typeface="Calibri"/>
+                <a:cs typeface="Calibri"/>
+              </a:rPr>
+              <a:t>slinga</a:t>
+            </a:r>
+            <a:r>
+              <a:rPr sz="2325" b="1">
+                <a:solidFill>
+                  <a:srgbClr val="064F91"/>
+                </a:solidFill>
+                <a:latin typeface="Calibri"/>
+                <a:ea typeface="Calibri"/>
+                <a:cs typeface="Calibri"/>
+              </a:rPr>
+              <a:t> = (</a:t>
+            </a:r>
+            <a:r>
+              <a:rPr sz="2325" b="1">
+                <a:solidFill>
+                  <a:srgbClr val="064F91"/>
+                </a:solidFill>
+                <a:latin typeface="Calibri"/>
+                <a:ea typeface="Calibri"/>
+                <a:cs typeface="Calibri"/>
+              </a:rPr>
+              <a:t>U</a:t>
+            </a:r>
+            <a:r>
+              <a:rPr sz="2325" b="1" baseline="-25000">
+                <a:solidFill>
+                  <a:srgbClr val="064F91"/>
+                </a:solidFill>
+                <a:latin typeface="Calibri"/>
+                <a:ea typeface="Calibri"/>
+                <a:cs typeface="Calibri"/>
+              </a:rPr>
+              <a:t>källa</a:t>
+            </a:r>
+            <a:r>
+              <a:rPr sz="2325" b="1">
+                <a:solidFill>
+                  <a:srgbClr val="064F91"/>
+                </a:solidFill>
+                <a:latin typeface="Calibri"/>
+                <a:ea typeface="Calibri"/>
+                <a:cs typeface="Calibri"/>
+              </a:rPr>
+              <a:t> − </a:t>
+            </a:r>
+            <a:r>
+              <a:rPr sz="2325" b="1">
+                <a:solidFill>
+                  <a:srgbClr val="064F91"/>
+                </a:solidFill>
+                <a:latin typeface="Calibri"/>
+                <a:ea typeface="Calibri"/>
+                <a:cs typeface="Calibri"/>
+              </a:rPr>
+              <a:t>U</a:t>
+            </a:r>
+            <a:r>
+              <a:rPr sz="2325" b="1" baseline="-25000">
+                <a:solidFill>
+                  <a:srgbClr val="064F91"/>
+                </a:solidFill>
+                <a:latin typeface="Calibri"/>
+                <a:ea typeface="Calibri"/>
+                <a:cs typeface="Calibri"/>
+              </a:rPr>
+              <a:t>last</a:t>
+            </a:r>
+            <a:r>
+              <a:rPr sz="2325" b="1">
+                <a:solidFill>
+                  <a:srgbClr val="064F91"/>
+                </a:solidFill>
+                <a:latin typeface="Calibri"/>
+                <a:ea typeface="Calibri"/>
+                <a:cs typeface="Calibri"/>
+              </a:rPr>
+              <a:t>)/I</a:t>
             </a:r>
           </a:p>
         </p:txBody>
@@ -9518,7 +10096,7 @@
                 <a:ea typeface="Calibri"/>
                 <a:cs typeface="Calibri"/>
               </a:rPr>
-              <a:t>1. Före: R = (12 − 10)/2 = 1 Ω.</a:t>
+              <a:t>1. Före: R = (12 − 10,5)/3 = 0,50 Ω.</a:t>
             </a:r>
           </a:p>
           <a:p xmlns:a="http://schemas.openxmlformats.org/drawingml/2006/main">
@@ -9541,7 +10119,7 @@
                 <a:ea typeface="Calibri"/>
                 <a:cs typeface="Calibri"/>
               </a:rPr>
-              <a:t>2. Efter: R = (12 − 11,8)/2 = 0,10 Ω.</a:t>
+              <a:t>2. Efter: R = (12 − 11,85)/3 = 0,05 Ω.</a:t>
             </a:r>
           </a:p>
           <a:p xmlns:a="http://schemas.openxmlformats.org/drawingml/2006/main">
@@ -9788,7 +10366,7 @@
       </p:sp>
       <p:sp>
         <p:nvSpPr>
-          <p:cNvPr id="10" name="P = √3 · Uᴸ · Iᴸ · PF">
+          <p:cNvPr id="10" name="P = √3 · UL · IL · PF">
             <a:extLst xmlns:a="http://schemas.openxmlformats.org/drawingml/2006/main">
               <a:ext uri="{FF2B5EF4-FFF2-40B4-BE49-F238E27FC236}">
                 <a16:creationId xmlns:a16="http://schemas.microsoft.com/office/drawing/2014/main" id="{AF78E3A3-442A-49A5-AAA6-CA79BDB8CA9A}"/>
@@ -9838,14 +10416,58 @@
                 <a:ea typeface="Calibri"/>
                 <a:cs typeface="Calibri"/>
               </a:rPr>
-              <a:t>P = √3 · Uᴸ · Iᴸ · PF</a:t>
-            </a:r>
-          </a:p>
-        </p:txBody>
-      </p:sp>
-      <p:sp>
-        <p:nvSpPr>
-          <p:cNvPr id="11" name="P är total aktiv trefaseffekt i W. Uᴸ och Iᴸ är linjevärden i V o">
+              <a:t>P = √3 · U</a:t>
+            </a:r>
+            <a:r>
+              <a:rPr sz="2400" b="1" baseline="-25000">
+                <a:solidFill>
+                  <a:srgbClr val="064F91"/>
+                </a:solidFill>
+                <a:latin typeface="Calibri"/>
+                <a:ea typeface="Calibri"/>
+                <a:cs typeface="Calibri"/>
+              </a:rPr>
+              <a:t>L</a:t>
+            </a:r>
+            <a:r>
+              <a:rPr sz="2400" b="1">
+                <a:solidFill>
+                  <a:srgbClr val="064F91"/>
+                </a:solidFill>
+                <a:latin typeface="Calibri"/>
+                <a:ea typeface="Calibri"/>
+                <a:cs typeface="Calibri"/>
+              </a:rPr>
+              <a:t> · I</a:t>
+            </a:r>
+            <a:r>
+              <a:rPr sz="2400" b="1" baseline="-25000">
+                <a:solidFill>
+                  <a:srgbClr val="064F91"/>
+                </a:solidFill>
+                <a:latin typeface="Calibri"/>
+                <a:ea typeface="Calibri"/>
+                <a:cs typeface="Calibri"/>
+              </a:rPr>
+              <a:t>L</a:t>
+            </a:r>
+            <a:r>
+              <a:rPr sz="2400" b="1">
+                <a:solidFill>
+                  <a:srgbClr val="064F91"/>
+                </a:solidFill>
+                <a:latin typeface="Calibri"/>
+                <a:ea typeface="Calibri"/>
+                <a:cs typeface="Calibri"/>
+              </a:rPr>
+              <a:t> · PF</a:t>
+            </a:r>
+          </a:p>
+        </p:txBody>
+      </p:sp>
+      <p:sp>
+        <p:nvSpPr>
+          <p:cNvPr id="11" name="P är total aktiv trefaseffekt i W. UL och IL är linjevärden i V o">
             <a:extLst xmlns:a="http://schemas.openxmlformats.org/drawingml/2006/main">
               <a:ext uri="{FF2B5EF4-FFF2-40B4-BE49-F238E27FC236}">
                 <a16:creationId xmlns:a16="http://schemas.microsoft.com/office/drawing/2014/main" id="{A74A5907-E95C-437F-B19E-3D1D7A34D937}"/>
@@ -9895,14 +10517,58 @@
                 <a:ea typeface="Calibri"/>
                 <a:cs typeface="Calibri"/>
               </a:rPr>
-              <a:t>P är total aktiv trefaseffekt i W. Uᴸ och Iᴸ är linjevärden i V och A RMS.</a:t>
-            </a:r>
-          </a:p>
-        </p:txBody>
-      </p:sp>
-      <p:sp>
-        <p:nvSpPr>
-          <p:cNvPr id="12" name="Förutsättningar: Symmetrisk trefas, Uᴸ = 400 V, Iᴸ = 8 A och PF =">
+              <a:t>P är total aktiv trefaseffekt i W. U</a:t>
+            </a:r>
+            <a:r>
+              <a:rPr sz="2100" b="0" baseline="-25000">
+                <a:solidFill>
+                  <a:srgbClr val="111111"/>
+                </a:solidFill>
+                <a:latin typeface="Calibri"/>
+                <a:ea typeface="Calibri"/>
+                <a:cs typeface="Calibri"/>
+              </a:rPr>
+              <a:t>L</a:t>
+            </a:r>
+            <a:r>
+              <a:rPr sz="2100" b="0">
+                <a:solidFill>
+                  <a:srgbClr val="111111"/>
+                </a:solidFill>
+                <a:latin typeface="Calibri"/>
+                <a:ea typeface="Calibri"/>
+                <a:cs typeface="Calibri"/>
+              </a:rPr>
+              <a:t> och I</a:t>
+            </a:r>
+            <a:r>
+              <a:rPr sz="2100" b="0" baseline="-25000">
+                <a:solidFill>
+                  <a:srgbClr val="111111"/>
+                </a:solidFill>
+                <a:latin typeface="Calibri"/>
+                <a:ea typeface="Calibri"/>
+                <a:cs typeface="Calibri"/>
+              </a:rPr>
+              <a:t>L</a:t>
+            </a:r>
+            <a:r>
+              <a:rPr sz="2100" b="0">
+                <a:solidFill>
+                  <a:srgbClr val="111111"/>
+                </a:solidFill>
+                <a:latin typeface="Calibri"/>
+                <a:ea typeface="Calibri"/>
+                <a:cs typeface="Calibri"/>
+              </a:rPr>
+              <a:t> är linjevärden i V och A RMS.</a:t>
+            </a:r>
+          </a:p>
+        </p:txBody>
+      </p:sp>
+      <p:sp>
+        <p:nvSpPr>
+          <p:cNvPr id="12" name="Förutsättningar: Symmetrisk trefas, UL = 400 V, IL = 8 A och PF =">
             <a:extLst xmlns:a="http://schemas.openxmlformats.org/drawingml/2006/main">
               <a:ext uri="{FF2B5EF4-FFF2-40B4-BE49-F238E27FC236}">
                 <a16:creationId xmlns:a16="http://schemas.microsoft.com/office/drawing/2014/main" id="{9F9FB7E3-3BE2-4E06-83A6-2E87263CD164}"/>
@@ -9952,7 +10618,51 @@
                 <a:ea typeface="Calibri"/>
                 <a:cs typeface="Calibri"/>
               </a:rPr>
-              <a:t>Förutsättningar: Symmetrisk trefas, Uᴸ = 400 V, Iᴸ = 8 A och PF = 0,80.</a:t>
+              <a:t>Förutsättningar: Symmetrisk trefas, U</a:t>
+            </a:r>
+            <a:r>
+              <a:rPr sz="2025" b="0" baseline="-25000">
+                <a:solidFill>
+                  <a:srgbClr val="111111"/>
+                </a:solidFill>
+                <a:latin typeface="Calibri"/>
+                <a:ea typeface="Calibri"/>
+                <a:cs typeface="Calibri"/>
+              </a:rPr>
+              <a:t>L</a:t>
+            </a:r>
+            <a:r>
+              <a:rPr sz="2025" b="0">
+                <a:solidFill>
+                  <a:srgbClr val="111111"/>
+                </a:solidFill>
+                <a:latin typeface="Calibri"/>
+                <a:ea typeface="Calibri"/>
+                <a:cs typeface="Calibri"/>
+              </a:rPr>
+              <a:t> = 400 V, I</a:t>
+            </a:r>
+            <a:r>
+              <a:rPr sz="2025" b="0" baseline="-25000">
+                <a:solidFill>
+                  <a:srgbClr val="111111"/>
+                </a:solidFill>
+                <a:latin typeface="Calibri"/>
+                <a:ea typeface="Calibri"/>
+                <a:cs typeface="Calibri"/>
+              </a:rPr>
+              <a:t>L</a:t>
+            </a:r>
+            <a:r>
+              <a:rPr sz="2025" b="0">
+                <a:solidFill>
+                  <a:srgbClr val="111111"/>
+                </a:solidFill>
+                <a:latin typeface="Calibri"/>
+                <a:ea typeface="Calibri"/>
+                <a:cs typeface="Calibri"/>
+              </a:rPr>
+              <a:t> = 8 A och PF = 0,80.</a:t>
             </a:r>
           </a:p>
         </p:txBody>
@@ -10235,7 +10945,7 @@
       </p:sp>
       <p:sp>
         <p:nvSpPr>
-          <p:cNvPr id="4" name="Symmetrisk trefas: Uᴸ = 400 V, Iᴸ = 8 A och PF = 0,80. Beräkna ak">
+          <p:cNvPr id="4" name="Symmetrisk trefas: UL = 400 V, IL = 8 A och PF = 0,80. Beräkna ak">
             <a:extLst xmlns:a="http://schemas.openxmlformats.org/drawingml/2006/main">
               <a:ext uri="{FF2B5EF4-FFF2-40B4-BE49-F238E27FC236}">
                 <a16:creationId xmlns:a16="http://schemas.microsoft.com/office/drawing/2014/main" id="{0628B717-DF05-454C-82E8-F7DC323E81F6}"/>
@@ -10286,7 +10996,51 @@
                 <a:ea typeface="Calibri"/>
                 <a:cs typeface="Calibri"/>
               </a:rPr>
-              <a:t>Symmetrisk trefas: Uᴸ = 400 V, Iᴸ = 8 A och PF = 0,80. Beräkna aktiv effekt.</a:t>
+              <a:t>Symmetrisk trefas: U</a:t>
+            </a:r>
+            <a:r>
+              <a:rPr sz="2400" b="0" baseline="-25000">
+                <a:solidFill>
+                  <a:srgbClr val="111111"/>
+                </a:solidFill>
+                <a:latin typeface="Calibri"/>
+                <a:ea typeface="Calibri"/>
+                <a:cs typeface="Calibri"/>
+              </a:rPr>
+              <a:t>L</a:t>
+            </a:r>
+            <a:r>
+              <a:rPr sz="2400" b="0">
+                <a:solidFill>
+                  <a:srgbClr val="111111"/>
+                </a:solidFill>
+                <a:latin typeface="Calibri"/>
+                <a:ea typeface="Calibri"/>
+                <a:cs typeface="Calibri"/>
+              </a:rPr>
+              <a:t> = 400 V, I</a:t>
+            </a:r>
+            <a:r>
+              <a:rPr sz="2400" b="0" baseline="-25000">
+                <a:solidFill>
+                  <a:srgbClr val="111111"/>
+                </a:solidFill>
+                <a:latin typeface="Calibri"/>
+                <a:ea typeface="Calibri"/>
+                <a:cs typeface="Calibri"/>
+              </a:rPr>
+              <a:t>L</a:t>
+            </a:r>
+            <a:r>
+              <a:rPr sz="2400" b="0">
+                <a:solidFill>
+                  <a:srgbClr val="111111"/>
+                </a:solidFill>
+                <a:latin typeface="Calibri"/>
+                <a:ea typeface="Calibri"/>
+                <a:cs typeface="Calibri"/>
+              </a:rPr>
+              <a:t> = 8 A och PF = 0,80. Beräkna aktiv effekt.</a:t>
             </a:r>
           </a:p>
         </p:txBody>
@@ -12524,7 +13278,7 @@
                 <a:ea typeface="Calibri"/>
                 <a:cs typeface="Calibri"/>
               </a:rPr>
-              <a:t>Hållkontakt ska ge sluten väg efter START-släpp</a:t>
+              <a:t>Vilken väg ska hålla K1 efter START-släpp?</a:t>
             </a:r>
           </a:p>
         </p:txBody>
@@ -13248,7 +14002,95 @@
                 <a:ea typeface="Calibri"/>
                 <a:cs typeface="Calibri"/>
               </a:rPr>
-              <a:t>Rslinga = (Ukälla − Ulast)/I</a:t>
+              <a:t>R</a:t>
+            </a:r>
+            <a:r>
+              <a:rPr sz="2400" b="1" baseline="-25000">
+                <a:solidFill>
+                  <a:srgbClr val="064F91"/>
+                </a:solidFill>
+                <a:latin typeface="Calibri"/>
+                <a:ea typeface="Calibri"/>
+                <a:cs typeface="Calibri"/>
+              </a:rPr>
+              <a:t>slinga</a:t>
+            </a:r>
+            <a:r>
+              <a:rPr sz="2400" b="1">
+                <a:solidFill>
+                  <a:srgbClr val="064F91"/>
+                </a:solidFill>
+                <a:latin typeface="Calibri"/>
+                <a:ea typeface="Calibri"/>
+                <a:cs typeface="Calibri"/>
+              </a:rPr>
+              <a:t> = (</a:t>
+            </a:r>
+            <a:r>
+              <a:rPr sz="2400" b="1">
+                <a:solidFill>
+                  <a:srgbClr val="064F91"/>
+                </a:solidFill>
+                <a:latin typeface="Calibri"/>
+                <a:ea typeface="Calibri"/>
+                <a:cs typeface="Calibri"/>
+              </a:rPr>
+              <a:t>U</a:t>
+            </a:r>
+            <a:r>
+              <a:rPr sz="2400" b="1" baseline="-25000">
+                <a:solidFill>
+                  <a:srgbClr val="064F91"/>
+                </a:solidFill>
+                <a:latin typeface="Calibri"/>
+                <a:ea typeface="Calibri"/>
+                <a:cs typeface="Calibri"/>
+              </a:rPr>
+              <a:t>källa</a:t>
+            </a:r>
+            <a:r>
+              <a:rPr sz="2400" b="1">
+                <a:solidFill>
+                  <a:srgbClr val="064F91"/>
+                </a:solidFill>
+                <a:latin typeface="Calibri"/>
+                <a:ea typeface="Calibri"/>
+                <a:cs typeface="Calibri"/>
+              </a:rPr>
+              <a:t> − </a:t>
+            </a:r>
+            <a:r>
+              <a:rPr sz="2400" b="1">
+                <a:solidFill>
+                  <a:srgbClr val="064F91"/>
+                </a:solidFill>
+                <a:latin typeface="Calibri"/>
+                <a:ea typeface="Calibri"/>
+                <a:cs typeface="Calibri"/>
+              </a:rPr>
+              <a:t>U</a:t>
+            </a:r>
+            <a:r>
+              <a:rPr sz="2400" b="1" baseline="-25000">
+                <a:solidFill>
+                  <a:srgbClr val="064F91"/>
+                </a:solidFill>
+                <a:latin typeface="Calibri"/>
+                <a:ea typeface="Calibri"/>
+                <a:cs typeface="Calibri"/>
+              </a:rPr>
+              <a:t>last</a:t>
+            </a:r>
+            <a:r>
+              <a:rPr sz="2400" b="1">
+                <a:solidFill>
+                  <a:srgbClr val="064F91"/>
+                </a:solidFill>
+                <a:latin typeface="Calibri"/>
+                <a:ea typeface="Calibri"/>
+                <a:cs typeface="Calibri"/>
+              </a:rPr>
+              <a:t>)/I</a:t>
             </a:r>
           </a:p>
         </p:txBody>
@@ -13660,7 +14502,7 @@
         <p:spPr>
           <a:xfrm xmlns:a="http://schemas.openxmlformats.org/drawingml/2006/main">
             <a:off x="762000" y="2533650"/>
-            <a:ext cx="7620000" cy="2286000"/>
+            <a:ext cx="3886200" cy="2606040"/>
           </a:xfrm>
           <a:prstGeom xmlns:a="http://schemas.openxmlformats.org/drawingml/2006/main" prst="rect">
             <a:avLst/>
@@ -13696,7 +14538,7 @@
                 <a:ea typeface="Calibri"/>
                 <a:cs typeface="Calibri"/>
               </a:rPr>
-              <a:t>En 24 V-källa matar en last. Vid 4 A mäts 20 V vid lasten. Efter åtgärd mäts 23,6 V vid samma ström. Beräkna slingresistans före och efter.</a:t>
+              <a:t>En 24 V-källa matar en last. Vid 4 A mäts 20 V vid lasten. Efter åtgärd mäts 23,6 V vid samma ström. Beräkna slingresistans före och efter.</a:t>
             </a:r>
           </a:p>
         </p:txBody>
@@ -13817,6 +14659,30 @@
           </a:p>
         </p:txBody>
       </p:sp>
+      <p:pic xmlns:a="http://schemas.openxmlformats.org/drawingml/2006/main" xmlns:r="http://schemas.openxmlformats.org/officeDocument/2006/relationships">
+        <p:nvPicPr>
+          <p:cNvPr id="9" name="Figur: 24 V-källa matar en last med 4 A; 20 V v" descr="24 V-källa matar en last med 4 A; 20 V vid lasten före och 23,6 V efter åtgärd; slingresistansen okänd"/>
+          <p:cNvPicPr>
+            <a:picLocks noChangeAspect="1"/>
+          </p:cNvPicPr>
+          <p:nvPr/>
+        </p:nvPicPr>
+        <p:blipFill>
+          <a:blip r:embed="rId3"/>
+          <a:stretch>
+            <a:fillRect/>
+          </a:stretch>
+        </p:blipFill>
+        <p:spPr>
+          <a:xfrm>
+            <a:off x="4846320" y="2331720"/>
+            <a:ext cx="3931920" cy="2740984"/>
+          </a:xfrm>
+          <a:prstGeom prst="rect">
+            <a:avLst/>
+          </a:prstGeom>
+        </p:spPr>
+      </p:pic>
     </p:spTree>
     <p:extLst>
       <p:ext uri="{BB962C8B-B14F-4D97-AF65-F5344CB8AC3E}">
@@ -14519,64 +15385,6 @@
       </p:sp>
       <p:sp>
         <p:nvSpPr>
-          <p:cNvPr id="8" name="Källor och lärarstöd finns även i bildanteckningarna.">
-            <a:extLst xmlns:a="http://schemas.openxmlformats.org/drawingml/2006/main">
-              <a:ext uri="{FF2B5EF4-FFF2-40B4-BE49-F238E27FC236}">
-                <a16:creationId xmlns:a16="http://schemas.microsoft.com/office/drawing/2014/main" id="{11E15268-96AF-4E2F-85C6-0EFB0353572A}"/>
-              </a:ext>
-            </a:extLst>
-          </p:cNvPr>
-          <p:cNvSpPr>
-            <a:spLocks xmlns:a="http://schemas.openxmlformats.org/drawingml/2006/main" noGrp="1"/>
-          </p:cNvSpPr>
-          <p:nvPr/>
-        </p:nvSpPr>
-        <p:spPr>
-          <a:xfrm xmlns:a="http://schemas.openxmlformats.org/drawingml/2006/main">
-            <a:off x="762000" y="5676900"/>
-            <a:ext cx="7620000" cy="352425"/>
-          </a:xfrm>
-          <a:prstGeom xmlns:a="http://schemas.openxmlformats.org/drawingml/2006/main" prst="rect">
-            <a:avLst/>
-          </a:prstGeom>
-          <a:noFill xmlns:a="http://schemas.openxmlformats.org/drawingml/2006/main"/>
-          <a:ln xmlns:a="http://schemas.openxmlformats.org/drawingml/2006/main" w="0">
-            <a:noFill/>
-          </a:ln>
-        </p:spPr>
-        <p:txBody>
-          <a:bodyPr xmlns:a="http://schemas.openxmlformats.org/drawingml/2006/main" wrap="square" lIns="0" tIns="0" rIns="0" bIns="0" anchor="t">
-            <a:noAutofit/>
-          </a:bodyPr>
-          <a:lstStyle xmlns:a="http://schemas.openxmlformats.org/drawingml/2006/main"/>
-          <a:p xmlns:a="http://schemas.openxmlformats.org/drawingml/2006/main">
-            <a:pPr algn="l">
-              <a:buNone/>
-              <a:defRPr sz="1800" b="0">
-                <a:solidFill>
-                  <a:srgbClr val="111111"/>
-                </a:solidFill>
-                <a:latin typeface="Calibri"/>
-                <a:ea typeface="Calibri"/>
-                <a:cs typeface="Calibri"/>
-              </a:defRPr>
-            </a:pPr>
-            <a:r>
-              <a:rPr sz="1800" b="0">
-                <a:solidFill>
-                  <a:srgbClr val="111111"/>
-                </a:solidFill>
-                <a:latin typeface="Calibri"/>
-                <a:ea typeface="Calibri"/>
-                <a:cs typeface="Calibri"/>
-              </a:rPr>
-              <a:t>Källor och lärarstöd finns även i bildanteckningarna.</a:t>
-            </a:r>
-          </a:p>
-        </p:txBody>
-      </p:sp>
-      <p:sp>
-        <p:nvSpPr>
           <p:cNvPr id="9" name="22">
             <a:extLst xmlns:a="http://schemas.openxmlformats.org/drawingml/2006/main">
               <a:ext uri="{FF2B5EF4-FFF2-40B4-BE49-F238E27FC236}">
@@ -16502,7 +17310,7 @@
       </p:sp>
       <p:sp>
         <p:nvSpPr>
-          <p:cNvPr id="4" name="|Z| = √(R² + X²)     P₃ꜰ = √3 UᴸIᴸ PF">
+          <p:cNvPr id="4" name="|Z| = √(R² + X²)     P₃F = √3 ULIL PF">
             <a:extLst xmlns:a="http://schemas.openxmlformats.org/drawingml/2006/main">
               <a:ext uri="{FF2B5EF4-FFF2-40B4-BE49-F238E27FC236}">
                 <a16:creationId xmlns:a16="http://schemas.microsoft.com/office/drawing/2014/main" id="{24C10D13-BEEC-47EA-81F5-52AB4737AD40}"/>
@@ -16553,7 +17361,73 @@
                 <a:ea typeface="Calibri"/>
                 <a:cs typeface="Calibri"/>
               </a:rPr>
-              <a:t>|Z| = √(R² + X²)     P₃ꜰ = √3 UᴸIᴸ PF</a:t>
+              <a:t>|Z| = √(R² + X²)     P₃</a:t>
+            </a:r>
+            <a:r>
+              <a:rPr sz="2925" b="1" baseline="-25000">
+                <a:solidFill>
+                  <a:srgbClr val="064F91"/>
+                </a:solidFill>
+                <a:latin typeface="Calibri"/>
+                <a:ea typeface="Calibri"/>
+                <a:cs typeface="Calibri"/>
+              </a:rPr>
+              <a:t>F</a:t>
+            </a:r>
+            <a:r>
+              <a:rPr sz="2925" b="1">
+                <a:solidFill>
+                  <a:srgbClr val="064F91"/>
+                </a:solidFill>
+                <a:latin typeface="Calibri"/>
+                <a:ea typeface="Calibri"/>
+                <a:cs typeface="Calibri"/>
+              </a:rPr>
+              <a:t> = √3 U</a:t>
+            </a:r>
+            <a:r>
+              <a:rPr sz="2925" b="1" baseline="-25000">
+                <a:solidFill>
+                  <a:srgbClr val="064F91"/>
+                </a:solidFill>
+                <a:latin typeface="Calibri"/>
+                <a:ea typeface="Calibri"/>
+                <a:cs typeface="Calibri"/>
+              </a:rPr>
+              <a:t>L</a:t>
+            </a:r>
+            <a:r>
+              <a:rPr sz="2925" b="1">
+                <a:solidFill>
+                  <a:srgbClr val="064F91"/>
+                </a:solidFill>
+                <a:latin typeface="Calibri"/>
+                <a:ea typeface="Calibri"/>
+                <a:cs typeface="Calibri"/>
+              </a:rPr>
+              <a:t>I</a:t>
+            </a:r>
+            <a:r>
+              <a:rPr sz="2925" b="1" baseline="-25000">
+                <a:solidFill>
+                  <a:srgbClr val="064F91"/>
+                </a:solidFill>
+                <a:latin typeface="Calibri"/>
+                <a:ea typeface="Calibri"/>
+                <a:cs typeface="Calibri"/>
+              </a:rPr>
+              <a:t>L</a:t>
+            </a:r>
+            <a:r>
+              <a:rPr sz="2925" b="1">
+                <a:solidFill>
+                  <a:srgbClr val="064F91"/>
+                </a:solidFill>
+                <a:latin typeface="Calibri"/>
+                <a:ea typeface="Calibri"/>
+                <a:cs typeface="Calibri"/>
+              </a:rPr>
+              <a:t> PF</a:t>
             </a:r>
           </a:p>
         </p:txBody>
@@ -16818,7 +17692,7 @@
         <p:spPr>
           <a:xfrm xmlns:a="http://schemas.openxmlformats.org/drawingml/2006/main">
             <a:off x="762000" y="1571625"/>
-            <a:ext cx="7620000" cy="990600"/>
+            <a:ext cx="3977639" cy="990600"/>
           </a:xfrm>
           <a:prstGeom xmlns:a="http://schemas.openxmlformats.org/drawingml/2006/main" prst="rect">
             <a:avLst/>
@@ -16845,15 +17719,15 @@
               </a:defRPr>
             </a:pPr>
             <a:r>
-              <a:rPr sz="2175" b="0">
-                <a:solidFill>
-                  <a:srgbClr val="111111"/>
-                </a:solidFill>
-                <a:latin typeface="Calibri"/>
-                <a:ea typeface="Calibri"/>
-                <a:cs typeface="Calibri"/>
-              </a:rPr>
-              <a:t>18 V matar 1 kΩ och 2 kΩ i serie. En last på 2 kΩ ansluts över den nedre resistorn.</a:t>
+              <a:rPr sz="2050" b="0">
+                <a:solidFill>
+                  <a:srgbClr val="111111"/>
+                </a:solidFill>
+                <a:latin typeface="Calibri"/>
+                <a:ea typeface="Calibri"/>
+                <a:cs typeface="Calibri"/>
+              </a:rPr>
+              <a:t>18 V matar 1 kΩ och 2 kΩ i serie. En last på 2 kΩ ansluts över den nedre resistorn.</a:t>
             </a:r>
           </a:p>
         </p:txBody>
@@ -16875,7 +17749,7 @@
         <p:spPr>
           <a:xfrm xmlns:a="http://schemas.openxmlformats.org/drawingml/2006/main">
             <a:off x="762000" y="2705100"/>
-            <a:ext cx="7620000" cy="790575"/>
+            <a:ext cx="3977639" cy="790575"/>
           </a:xfrm>
           <a:prstGeom xmlns:a="http://schemas.openxmlformats.org/drawingml/2006/main" prst="rect">
             <a:avLst/>
@@ -16902,7 +17776,7 @@
               </a:defRPr>
             </a:pPr>
             <a:r>
-              <a:rPr sz="2325" b="1">
+              <a:rPr sz="2250" b="1">
                 <a:solidFill>
                   <a:srgbClr val="064F91"/>
                 </a:solidFill>
@@ -16910,7 +17784,62 @@
                 <a:ea typeface="Calibri"/>
                 <a:cs typeface="Calibri"/>
               </a:rPr>
-              <a:t>Rp = R₂Rlast/(R₂ + Rlast)</a:t>
+              <a:t>R</a:t>
+            </a:r>
+            <a:r>
+              <a:rPr sz="2250" b="1" baseline="-25000">
+                <a:solidFill>
+                  <a:srgbClr val="064F91"/>
+                </a:solidFill>
+                <a:latin typeface="Calibri"/>
+                <a:ea typeface="Calibri"/>
+                <a:cs typeface="Calibri"/>
+              </a:rPr>
+              <a:t>p</a:t>
+            </a:r>
+            <a:r>
+              <a:rPr sz="2250" b="1">
+                <a:solidFill>
+                  <a:srgbClr val="064F91"/>
+                </a:solidFill>
+                <a:latin typeface="Calibri"/>
+                <a:ea typeface="Calibri"/>
+                <a:cs typeface="Calibri"/>
+              </a:rPr>
+              <a:t> = R₂Rlast/(R₂ + </a:t>
+            </a:r>
+            <a:r>
+              <a:rPr sz="2250" b="1">
+                <a:solidFill>
+                  <a:srgbClr val="064F91"/>
+                </a:solidFill>
+                <a:latin typeface="Calibri"/>
+                <a:ea typeface="Calibri"/>
+                <a:cs typeface="Calibri"/>
+              </a:rPr>
+              <a:t>R</a:t>
+            </a:r>
+            <a:r>
+              <a:rPr sz="2250" b="1" baseline="-25000">
+                <a:solidFill>
+                  <a:srgbClr val="064F91"/>
+                </a:solidFill>
+                <a:latin typeface="Calibri"/>
+                <a:ea typeface="Calibri"/>
+                <a:cs typeface="Calibri"/>
+              </a:rPr>
+              <a:t>last</a:t>
+            </a:r>
+            <a:r>
+              <a:rPr sz="2250" b="1">
+                <a:solidFill>
+                  <a:srgbClr val="064F91"/>
+                </a:solidFill>
+                <a:latin typeface="Calibri"/>
+                <a:ea typeface="Calibri"/>
+                <a:cs typeface="Calibri"/>
+              </a:rPr>
+              <a:t>)</a:t>
             </a:r>
           </a:p>
           <a:p xmlns:a="http://schemas.openxmlformats.org/drawingml/2006/main">
@@ -16925,7 +17854,7 @@
               </a:defRPr>
             </a:pPr>
             <a:r>
-              <a:rPr sz="2325" b="1">
+              <a:rPr sz="2250" b="1">
                 <a:solidFill>
                   <a:srgbClr val="064F91"/>
                 </a:solidFill>
@@ -16933,7 +17862,62 @@
                 <a:ea typeface="Calibri"/>
                 <a:cs typeface="Calibri"/>
               </a:rPr>
-              <a:t>Uut = UinRp/(R₁ + Rp)</a:t>
+              <a:t>U</a:t>
+            </a:r>
+            <a:r>
+              <a:rPr sz="2250" b="1" baseline="-25000">
+                <a:solidFill>
+                  <a:srgbClr val="064F91"/>
+                </a:solidFill>
+                <a:latin typeface="Calibri"/>
+                <a:ea typeface="Calibri"/>
+                <a:cs typeface="Calibri"/>
+              </a:rPr>
+              <a:t>ut</a:t>
+            </a:r>
+            <a:r>
+              <a:rPr sz="2250" b="1">
+                <a:solidFill>
+                  <a:srgbClr val="064F91"/>
+                </a:solidFill>
+                <a:latin typeface="Calibri"/>
+                <a:ea typeface="Calibri"/>
+                <a:cs typeface="Calibri"/>
+              </a:rPr>
+              <a:t> = UinRp/(R₁ + </a:t>
+            </a:r>
+            <a:r>
+              <a:rPr sz="2250" b="1">
+                <a:solidFill>
+                  <a:srgbClr val="064F91"/>
+                </a:solidFill>
+                <a:latin typeface="Calibri"/>
+                <a:ea typeface="Calibri"/>
+                <a:cs typeface="Calibri"/>
+              </a:rPr>
+              <a:t>R</a:t>
+            </a:r>
+            <a:r>
+              <a:rPr sz="2250" b="1" baseline="-25000">
+                <a:solidFill>
+                  <a:srgbClr val="064F91"/>
+                </a:solidFill>
+                <a:latin typeface="Calibri"/>
+                <a:ea typeface="Calibri"/>
+                <a:cs typeface="Calibri"/>
+              </a:rPr>
+              <a:t>p</a:t>
+            </a:r>
+            <a:r>
+              <a:rPr sz="2250" b="1">
+                <a:solidFill>
+                  <a:srgbClr val="064F91"/>
+                </a:solidFill>
+                <a:latin typeface="Calibri"/>
+                <a:ea typeface="Calibri"/>
+                <a:cs typeface="Calibri"/>
+              </a:rPr>
+              <a:t>)</a:t>
             </a:r>
           </a:p>
         </p:txBody>
@@ -16955,7 +17939,7 @@
         <p:spPr>
           <a:xfrm xmlns:a="http://schemas.openxmlformats.org/drawingml/2006/main">
             <a:off x="762000" y="3657600"/>
-            <a:ext cx="7620000" cy="1524000"/>
+            <a:ext cx="3977639" cy="1524000"/>
           </a:xfrm>
           <a:prstGeom xmlns:a="http://schemas.openxmlformats.org/drawingml/2006/main" prst="rect">
             <a:avLst/>
@@ -16982,15 +17966,48 @@
               </a:defRPr>
             </a:pPr>
             <a:r>
-              <a:rPr sz="2063" b="0">
-                <a:solidFill>
-                  <a:srgbClr val="111111"/>
-                </a:solidFill>
-                <a:latin typeface="Calibri"/>
-                <a:ea typeface="Calibri"/>
-                <a:cs typeface="Calibri"/>
-              </a:rPr>
-              <a:t>1. Rp = 2 · 2/(2 + 2) = 1 kΩ.</a:t>
+              <a:rPr sz="1900" b="0">
+                <a:solidFill>
+                  <a:srgbClr val="111111"/>
+                </a:solidFill>
+                <a:latin typeface="Calibri"/>
+                <a:ea typeface="Calibri"/>
+                <a:cs typeface="Calibri"/>
+              </a:rPr>
+              <a:t>1. </a:t>
+            </a:r>
+            <a:r>
+              <a:rPr sz="1900" b="0">
+                <a:solidFill>
+                  <a:srgbClr val="111111"/>
+                </a:solidFill>
+                <a:latin typeface="Calibri"/>
+                <a:ea typeface="Calibri"/>
+                <a:cs typeface="Calibri"/>
+              </a:rPr>
+              <a:t>R</a:t>
+            </a:r>
+            <a:r>
+              <a:rPr sz="1900" b="0" baseline="-25000">
+                <a:solidFill>
+                  <a:srgbClr val="111111"/>
+                </a:solidFill>
+                <a:latin typeface="Calibri"/>
+                <a:ea typeface="Calibri"/>
+                <a:cs typeface="Calibri"/>
+              </a:rPr>
+              <a:t>p</a:t>
+            </a:r>
+            <a:r>
+              <a:rPr sz="1900" b="0">
+                <a:solidFill>
+                  <a:srgbClr val="111111"/>
+                </a:solidFill>
+                <a:latin typeface="Calibri"/>
+                <a:ea typeface="Calibri"/>
+                <a:cs typeface="Calibri"/>
+              </a:rPr>
+              <a:t> = 2 · 2/(2 + 2) = 1 kΩ.</a:t>
             </a:r>
           </a:p>
           <a:p xmlns:a="http://schemas.openxmlformats.org/drawingml/2006/main">
@@ -17005,15 +18022,48 @@
               </a:defRPr>
             </a:pPr>
             <a:r>
-              <a:rPr sz="2063" b="0">
-                <a:solidFill>
-                  <a:srgbClr val="111111"/>
-                </a:solidFill>
-                <a:latin typeface="Calibri"/>
-                <a:ea typeface="Calibri"/>
-                <a:cs typeface="Calibri"/>
-              </a:rPr>
-              <a:t>2. Uut = 18 · 1/(1 + 1) = 9 V.</a:t>
+              <a:rPr sz="1900" b="0">
+                <a:solidFill>
+                  <a:srgbClr val="111111"/>
+                </a:solidFill>
+                <a:latin typeface="Calibri"/>
+                <a:ea typeface="Calibri"/>
+                <a:cs typeface="Calibri"/>
+              </a:rPr>
+              <a:t>2. </a:t>
+            </a:r>
+            <a:r>
+              <a:rPr sz="1900" b="0">
+                <a:solidFill>
+                  <a:srgbClr val="111111"/>
+                </a:solidFill>
+                <a:latin typeface="Calibri"/>
+                <a:ea typeface="Calibri"/>
+                <a:cs typeface="Calibri"/>
+              </a:rPr>
+              <a:t>U</a:t>
+            </a:r>
+            <a:r>
+              <a:rPr sz="1900" b="0" baseline="-25000">
+                <a:solidFill>
+                  <a:srgbClr val="111111"/>
+                </a:solidFill>
+                <a:latin typeface="Calibri"/>
+                <a:ea typeface="Calibri"/>
+                <a:cs typeface="Calibri"/>
+              </a:rPr>
+              <a:t>ut</a:t>
+            </a:r>
+            <a:r>
+              <a:rPr sz="1900" b="0">
+                <a:solidFill>
+                  <a:srgbClr val="111111"/>
+                </a:solidFill>
+                <a:latin typeface="Calibri"/>
+                <a:ea typeface="Calibri"/>
+                <a:cs typeface="Calibri"/>
+              </a:rPr>
+              <a:t> = 18 · 1/(1 + 1) = 9 V.</a:t>
             </a:r>
           </a:p>
           <a:p xmlns:a="http://schemas.openxmlformats.org/drawingml/2006/main">
@@ -17028,15 +18078,48 @@
               </a:defRPr>
             </a:pPr>
             <a:r>
-              <a:rPr sz="2063" b="0">
-                <a:solidFill>
-                  <a:srgbClr val="111111"/>
-                </a:solidFill>
-                <a:latin typeface="Calibri"/>
-                <a:ea typeface="Calibri"/>
-                <a:cs typeface="Calibri"/>
-              </a:rPr>
-              <a:t>3. Itotal = 18/(1 + 1) = 9 mA. Varje nedre gren får 4,5 mA.</a:t>
+              <a:rPr sz="1900" b="0">
+                <a:solidFill>
+                  <a:srgbClr val="111111"/>
+                </a:solidFill>
+                <a:latin typeface="Calibri"/>
+                <a:ea typeface="Calibri"/>
+                <a:cs typeface="Calibri"/>
+              </a:rPr>
+              <a:t>3. </a:t>
+            </a:r>
+            <a:r>
+              <a:rPr sz="1900" b="0">
+                <a:solidFill>
+                  <a:srgbClr val="111111"/>
+                </a:solidFill>
+                <a:latin typeface="Calibri"/>
+                <a:ea typeface="Calibri"/>
+                <a:cs typeface="Calibri"/>
+              </a:rPr>
+              <a:t>I</a:t>
+            </a:r>
+            <a:r>
+              <a:rPr sz="1900" b="0" baseline="-25000">
+                <a:solidFill>
+                  <a:srgbClr val="111111"/>
+                </a:solidFill>
+                <a:latin typeface="Calibri"/>
+                <a:ea typeface="Calibri"/>
+                <a:cs typeface="Calibri"/>
+              </a:rPr>
+              <a:t>total</a:t>
+            </a:r>
+            <a:r>
+              <a:rPr sz="1900" b="0">
+                <a:solidFill>
+                  <a:srgbClr val="111111"/>
+                </a:solidFill>
+                <a:latin typeface="Calibri"/>
+                <a:ea typeface="Calibri"/>
+                <a:cs typeface="Calibri"/>
+              </a:rPr>
+              <a:t> = 18/(1 + 1) = 9 mA. Varje nedre gren får 4,5 mA.</a:t>
             </a:r>
           </a:p>
         </p:txBody>
@@ -17058,7 +18141,7 @@
         <p:spPr>
           <a:xfrm xmlns:a="http://schemas.openxmlformats.org/drawingml/2006/main">
             <a:off x="762000" y="5372100"/>
-            <a:ext cx="7620000" cy="685800"/>
+            <a:ext cx="3977639" cy="685800"/>
           </a:xfrm>
           <a:prstGeom xmlns:a="http://schemas.openxmlformats.org/drawingml/2006/main" prst="rect">
             <a:avLst/>
@@ -17085,15 +18168,15 @@
               </a:defRPr>
             </a:pPr>
             <a:r>
-              <a:rPr sz="1913" b="0">
-                <a:solidFill>
-                  <a:srgbClr val="111111"/>
-                </a:solidFill>
-                <a:latin typeface="Calibri"/>
-                <a:ea typeface="Calibri"/>
-                <a:cs typeface="Calibri"/>
-              </a:rPr>
-              <a:t>Kontroll: 4,5 + 4,5 = 9 mA och fall över övre resistorn är 9 V. Båda Kirchhofflagarna stämmer.</a:t>
+              <a:rPr sz="1550" b="0">
+                <a:solidFill>
+                  <a:srgbClr val="111111"/>
+                </a:solidFill>
+                <a:latin typeface="Calibri"/>
+                <a:ea typeface="Calibri"/>
+                <a:cs typeface="Calibri"/>
+              </a:rPr>
+              <a:t>Kontroll: 4,5 + 4,5 = 9 mA och fall över övre resistorn är 9 V. Båda Kirchhofflagarna stämmer.</a:t>
             </a:r>
           </a:p>
         </p:txBody>
@@ -17155,6 +18238,30 @@
           </a:p>
         </p:txBody>
       </p:sp>
+      <p:pic xmlns:a="http://schemas.openxmlformats.org/drawingml/2006/main" xmlns:r="http://schemas.openxmlformats.org/officeDocument/2006/relationships">
+        <p:nvPicPr>
+          <p:cNvPr id="16" name="Figur: Spänningsdelare: 18 V över 1 kilohm och " descr="Spänningsdelare: 18 V över 1 kilohm och 2 kilohm med en last på 2 kilohm; utspänningen 9 V"/>
+          <p:cNvPicPr>
+            <a:picLocks noChangeAspect="1"/>
+          </p:cNvPicPr>
+          <p:nvPr/>
+        </p:nvPicPr>
+        <p:blipFill>
+          <a:blip r:embed="rId3"/>
+          <a:stretch>
+            <a:fillRect/>
+          </a:stretch>
+        </p:blipFill>
+        <p:spPr>
+          <a:xfrm>
+            <a:off x="4892040" y="1645920"/>
+            <a:ext cx="3886200" cy="2709112"/>
+          </a:xfrm>
+          <a:prstGeom prst="rect">
+            <a:avLst/>
+          </a:prstGeom>
+        </p:spPr>
+      </p:pic>
     </p:spTree>
     <p:extLst>
       <p:ext uri="{BB962C8B-B14F-4D97-AF65-F5344CB8AC3E}">

--- a/sjoskolan/vecka-45/aktuell/v45_03_Repetition_infor_tentamen_elev.pptx
+++ b/sjoskolan/vecka-45/aktuell/v45_03_Repetition_infor_tentamen_elev.pptx
@@ -3512,6 +3512,10 @@
             <a:noFill/>
           </a:ln>
         </p:spPr>
+        <p:txBody xmlns:a="http://schemas.openxmlformats.org/drawingml/2006/main">
+          <a:bodyPr/>
+          <a:p/>
+        </p:txBody>
       </p:sp>
       <p:sp>
         <p:nvSpPr>
@@ -5336,7 +5340,40 @@
                 <a:ea typeface="Calibri"/>
                 <a:cs typeface="Calibri"/>
               </a:rPr>
-              <a:t> = R₂Rlast/(R₂ + </a:t>
+              <a:t> = R₂ · </a:t>
+            </a:r>
+            <a:r>
+              <a:rPr sz="2400" b="1">
+                <a:solidFill>
+                  <a:srgbClr val="064F91"/>
+                </a:solidFill>
+                <a:latin typeface="Calibri"/>
+                <a:ea typeface="Calibri"/>
+                <a:cs typeface="Calibri"/>
+              </a:rPr>
+              <a:t>R</a:t>
+            </a:r>
+            <a:r>
+              <a:rPr sz="2400" b="1" baseline="-25000">
+                <a:solidFill>
+                  <a:srgbClr val="064F91"/>
+                </a:solidFill>
+                <a:latin typeface="Calibri"/>
+                <a:ea typeface="Calibri"/>
+                <a:cs typeface="Calibri"/>
+              </a:rPr>
+              <a:t>last</a:t>
+            </a:r>
+            <a:r>
+              <a:rPr sz="2400" b="1">
+                <a:solidFill>
+                  <a:srgbClr val="064F91"/>
+                </a:solidFill>
+                <a:latin typeface="Calibri"/>
+                <a:ea typeface="Calibri"/>
+                <a:cs typeface="Calibri"/>
+              </a:rPr>
+              <a:t>/(R₂ + </a:t>
             </a:r>
             <a:r>
               <a:rPr sz="2400" b="1">
@@ -9894,7 +9931,7 @@
                 <a:ea typeface="Calibri"/>
                 <a:cs typeface="Calibri"/>
               </a:rPr>
-              <a:t>Källan håller 12 V. Vid 3 A får lasten 10,5 V före och 11,85 V efter åtgärd.</a:t>
+              <a:t>Källan håller 12 V. Vid 3 A får lasten 10,5 V före och 11,85 V efter åtgärd (strömmen antas oförändrad).</a:t>
             </a:r>
           </a:p>
         </p:txBody>
@@ -17727,7 +17764,7 @@
                 <a:ea typeface="Calibri"/>
                 <a:cs typeface="Calibri"/>
               </a:rPr>
-              <a:t>18 V matar 1 kΩ och 2 kΩ i serie. En last på 2 kΩ ansluts över den nedre resistorn.</a:t>
+              <a:t>18 V matar 2 kΩ och 2 kΩ i serie. En last på 2 kΩ ansluts över den nedre resistorn.</a:t>
             </a:r>
           </a:p>
         </p:txBody>
@@ -17776,7 +17813,7 @@
               </a:defRPr>
             </a:pPr>
             <a:r>
-              <a:rPr sz="2250" b="1">
+              <a:rPr sz="2000" b="1">
                 <a:solidFill>
                   <a:srgbClr val="064F91"/>
                 </a:solidFill>
@@ -17787,7 +17824,7 @@
               <a:t>R</a:t>
             </a:r>
             <a:r>
-              <a:rPr sz="2250" b="1" baseline="-25000">
+              <a:rPr sz="2000" b="1" baseline="-25000">
                 <a:solidFill>
                   <a:srgbClr val="064F91"/>
                 </a:solidFill>
@@ -17798,7 +17835,7 @@
               <a:t>p</a:t>
             </a:r>
             <a:r>
-              <a:rPr sz="2250" b="1">
+              <a:rPr sz="2000" b="1">
                 <a:solidFill>
                   <a:srgbClr val="064F91"/>
                 </a:solidFill>
@@ -17806,10 +17843,10 @@
                 <a:ea typeface="Calibri"/>
                 <a:cs typeface="Calibri"/>
               </a:rPr>
-              <a:t> = R₂Rlast/(R₂ + </a:t>
-            </a:r>
-            <a:r>
-              <a:rPr sz="2250" b="1">
+              <a:t> = R₂ · </a:t>
+            </a:r>
+            <a:r>
+              <a:rPr sz="2000" b="1">
                 <a:solidFill>
                   <a:srgbClr val="064F91"/>
                 </a:solidFill>
@@ -17820,7 +17857,7 @@
               <a:t>R</a:t>
             </a:r>
             <a:r>
-              <a:rPr sz="2250" b="1" baseline="-25000">
+              <a:rPr sz="2000" b="1" baseline="-25000">
                 <a:solidFill>
                   <a:srgbClr val="064F91"/>
                 </a:solidFill>
@@ -17831,7 +17868,40 @@
               <a:t>last</a:t>
             </a:r>
             <a:r>
-              <a:rPr sz="2250" b="1">
+              <a:rPr sz="2000" b="1">
+                <a:solidFill>
+                  <a:srgbClr val="064F91"/>
+                </a:solidFill>
+                <a:latin typeface="Calibri"/>
+                <a:ea typeface="Calibri"/>
+                <a:cs typeface="Calibri"/>
+              </a:rPr>
+              <a:t>/(R₂ + </a:t>
+            </a:r>
+            <a:r>
+              <a:rPr sz="2000" b="1">
+                <a:solidFill>
+                  <a:srgbClr val="064F91"/>
+                </a:solidFill>
+                <a:latin typeface="Calibri"/>
+                <a:ea typeface="Calibri"/>
+                <a:cs typeface="Calibri"/>
+              </a:rPr>
+              <a:t>R</a:t>
+            </a:r>
+            <a:r>
+              <a:rPr sz="2000" b="1" baseline="-25000">
+                <a:solidFill>
+                  <a:srgbClr val="064F91"/>
+                </a:solidFill>
+                <a:latin typeface="Calibri"/>
+                <a:ea typeface="Calibri"/>
+                <a:cs typeface="Calibri"/>
+              </a:rPr>
+              <a:t>last</a:t>
+            </a:r>
+            <a:r>
+              <a:rPr sz="2000" b="1">
                 <a:solidFill>
                   <a:srgbClr val="064F91"/>
                 </a:solidFill>
@@ -17854,7 +17924,7 @@
               </a:defRPr>
             </a:pPr>
             <a:r>
-              <a:rPr sz="2250" b="1">
+              <a:rPr sz="2000" b="1">
                 <a:solidFill>
                   <a:srgbClr val="064F91"/>
                 </a:solidFill>
@@ -17865,7 +17935,7 @@
               <a:t>U</a:t>
             </a:r>
             <a:r>
-              <a:rPr sz="2250" b="1" baseline="-25000">
+              <a:rPr sz="2000" b="1" baseline="-25000">
                 <a:solidFill>
                   <a:srgbClr val="064F91"/>
                 </a:solidFill>
@@ -17876,7 +17946,7 @@
               <a:t>ut</a:t>
             </a:r>
             <a:r>
-              <a:rPr sz="2250" b="1">
+              <a:rPr sz="2000" b="1">
                 <a:solidFill>
                   <a:srgbClr val="064F91"/>
                 </a:solidFill>
@@ -17884,10 +17954,10 @@
                 <a:ea typeface="Calibri"/>
                 <a:cs typeface="Calibri"/>
               </a:rPr>
-              <a:t> = UinRp/(R₁ + </a:t>
-            </a:r>
-            <a:r>
-              <a:rPr sz="2250" b="1">
+              <a:t> = </a:t>
+            </a:r>
+            <a:r>
+              <a:rPr sz="2000" b="1">
                 <a:solidFill>
                   <a:srgbClr val="064F91"/>
                 </a:solidFill>
@@ -17895,10 +17965,43 @@
                 <a:ea typeface="Calibri"/>
                 <a:cs typeface="Calibri"/>
               </a:rPr>
+              <a:t>U</a:t>
+            </a:r>
+            <a:r>
+              <a:rPr sz="2000" b="1" baseline="-25000">
+                <a:solidFill>
+                  <a:srgbClr val="064F91"/>
+                </a:solidFill>
+                <a:latin typeface="Calibri"/>
+                <a:ea typeface="Calibri"/>
+                <a:cs typeface="Calibri"/>
+              </a:rPr>
+              <a:t>in</a:t>
+            </a:r>
+            <a:r>
+              <a:rPr sz="2000" b="1">
+                <a:solidFill>
+                  <a:srgbClr val="064F91"/>
+                </a:solidFill>
+                <a:latin typeface="Calibri"/>
+                <a:ea typeface="Calibri"/>
+                <a:cs typeface="Calibri"/>
+              </a:rPr>
+              <a:t> · </a:t>
+            </a:r>
+            <a:r>
+              <a:rPr sz="2000" b="1">
+                <a:solidFill>
+                  <a:srgbClr val="064F91"/>
+                </a:solidFill>
+                <a:latin typeface="Calibri"/>
+                <a:ea typeface="Calibri"/>
+                <a:cs typeface="Calibri"/>
+              </a:rPr>
               <a:t>R</a:t>
             </a:r>
             <a:r>
-              <a:rPr sz="2250" b="1" baseline="-25000">
+              <a:rPr sz="2000" b="1" baseline="-25000">
                 <a:solidFill>
                   <a:srgbClr val="064F91"/>
                 </a:solidFill>
@@ -17909,7 +18012,40 @@
               <a:t>p</a:t>
             </a:r>
             <a:r>
-              <a:rPr sz="2250" b="1">
+              <a:rPr sz="2000" b="1">
+                <a:solidFill>
+                  <a:srgbClr val="064F91"/>
+                </a:solidFill>
+                <a:latin typeface="Calibri"/>
+                <a:ea typeface="Calibri"/>
+                <a:cs typeface="Calibri"/>
+              </a:rPr>
+              <a:t>/(R₁ + </a:t>
+            </a:r>
+            <a:r>
+              <a:rPr sz="2000" b="1">
+                <a:solidFill>
+                  <a:srgbClr val="064F91"/>
+                </a:solidFill>
+                <a:latin typeface="Calibri"/>
+                <a:ea typeface="Calibri"/>
+                <a:cs typeface="Calibri"/>
+              </a:rPr>
+              <a:t>R</a:t>
+            </a:r>
+            <a:r>
+              <a:rPr sz="2000" b="1" baseline="-25000">
+                <a:solidFill>
+                  <a:srgbClr val="064F91"/>
+                </a:solidFill>
+                <a:latin typeface="Calibri"/>
+                <a:ea typeface="Calibri"/>
+                <a:cs typeface="Calibri"/>
+              </a:rPr>
+              <a:t>p</a:t>
+            </a:r>
+            <a:r>
+              <a:rPr sz="2000" b="1">
                 <a:solidFill>
                   <a:srgbClr val="064F91"/>
                 </a:solidFill>
@@ -17966,7 +18102,7 @@
               </a:defRPr>
             </a:pPr>
             <a:r>
-              <a:rPr sz="1900" b="0">
+              <a:rPr sz="1950" b="0">
                 <a:solidFill>
                   <a:srgbClr val="111111"/>
                 </a:solidFill>
@@ -17977,7 +18113,7 @@
               <a:t>1. </a:t>
             </a:r>
             <a:r>
-              <a:rPr sz="1900" b="0">
+              <a:rPr sz="1950" b="0">
                 <a:solidFill>
                   <a:srgbClr val="111111"/>
                 </a:solidFill>
@@ -17988,7 +18124,7 @@
               <a:t>R</a:t>
             </a:r>
             <a:r>
-              <a:rPr sz="1900" b="0" baseline="-25000">
+              <a:rPr sz="1950" b="0" baseline="-25000">
                 <a:solidFill>
                   <a:srgbClr val="111111"/>
                 </a:solidFill>
@@ -17999,7 +18135,7 @@
               <a:t>p</a:t>
             </a:r>
             <a:r>
-              <a:rPr sz="1900" b="0">
+              <a:rPr sz="1950" b="0">
                 <a:solidFill>
                   <a:srgbClr val="111111"/>
                 </a:solidFill>
@@ -18022,7 +18158,7 @@
               </a:defRPr>
             </a:pPr>
             <a:r>
-              <a:rPr sz="1900" b="0">
+              <a:rPr sz="1950" b="0">
                 <a:solidFill>
                   <a:srgbClr val="111111"/>
                 </a:solidFill>
@@ -18033,7 +18169,7 @@
               <a:t>2. </a:t>
             </a:r>
             <a:r>
-              <a:rPr sz="1900" b="0">
+              <a:rPr sz="1950" b="0">
                 <a:solidFill>
                   <a:srgbClr val="111111"/>
                 </a:solidFill>
@@ -18044,7 +18180,7 @@
               <a:t>U</a:t>
             </a:r>
             <a:r>
-              <a:rPr sz="1900" b="0" baseline="-25000">
+              <a:rPr sz="1950" b="0" baseline="-25000">
                 <a:solidFill>
                   <a:srgbClr val="111111"/>
                 </a:solidFill>
@@ -18055,15 +18191,15 @@
               <a:t>ut</a:t>
             </a:r>
             <a:r>
-              <a:rPr sz="1900" b="0">
-                <a:solidFill>
-                  <a:srgbClr val="111111"/>
-                </a:solidFill>
-                <a:latin typeface="Calibri"/>
-                <a:ea typeface="Calibri"/>
-                <a:cs typeface="Calibri"/>
-              </a:rPr>
-              <a:t> = 18 · 1/(1 + 1) = 9 V.</a:t>
+              <a:rPr sz="1950" b="0">
+                <a:solidFill>
+                  <a:srgbClr val="111111"/>
+                </a:solidFill>
+                <a:latin typeface="Calibri"/>
+                <a:ea typeface="Calibri"/>
+                <a:cs typeface="Calibri"/>
+              </a:rPr>
+              <a:t> = 18 · 1/(2 + 1) = 6 V.</a:t>
             </a:r>
           </a:p>
           <a:p xmlns:a="http://schemas.openxmlformats.org/drawingml/2006/main">
@@ -18078,7 +18214,7 @@
               </a:defRPr>
             </a:pPr>
             <a:r>
-              <a:rPr sz="1900" b="0">
+              <a:rPr sz="1950" b="0">
                 <a:solidFill>
                   <a:srgbClr val="111111"/>
                 </a:solidFill>
@@ -18089,7 +18225,7 @@
               <a:t>3. </a:t>
             </a:r>
             <a:r>
-              <a:rPr sz="1900" b="0">
+              <a:rPr sz="1950" b="0">
                 <a:solidFill>
                   <a:srgbClr val="111111"/>
                 </a:solidFill>
@@ -18100,7 +18236,7 @@
               <a:t>I</a:t>
             </a:r>
             <a:r>
-              <a:rPr sz="1900" b="0" baseline="-25000">
+              <a:rPr sz="1950" b="0" baseline="-25000">
                 <a:solidFill>
                   <a:srgbClr val="111111"/>
                 </a:solidFill>
@@ -18111,15 +18247,15 @@
               <a:t>total</a:t>
             </a:r>
             <a:r>
-              <a:rPr sz="1900" b="0">
-                <a:solidFill>
-                  <a:srgbClr val="111111"/>
-                </a:solidFill>
-                <a:latin typeface="Calibri"/>
-                <a:ea typeface="Calibri"/>
-                <a:cs typeface="Calibri"/>
-              </a:rPr>
-              <a:t> = 18/(1 + 1) = 9 mA. Varje nedre gren får 4,5 mA.</a:t>
+              <a:rPr sz="1950" b="0">
+                <a:solidFill>
+                  <a:srgbClr val="111111"/>
+                </a:solidFill>
+                <a:latin typeface="Calibri"/>
+                <a:ea typeface="Calibri"/>
+                <a:cs typeface="Calibri"/>
+              </a:rPr>
+              <a:t> = 18/(2 + 1) = 6 mA. Varje nedre gren får 3 mA.</a:t>
             </a:r>
           </a:p>
         </p:txBody>
@@ -18176,7 +18312,7 @@
                 <a:ea typeface="Calibri"/>
                 <a:cs typeface="Calibri"/>
               </a:rPr>
-              <a:t>Kontroll: 4,5 + 4,5 = 9 mA och fall över övre resistorn är 9 V. Båda Kirchhofflagarna stämmer.</a:t>
+              <a:t>Kontroll: 3 + 3 = 6 mA och fallet över övre resistorn är 12 V. 12 + 6 = 18 V.</a:t>
             </a:r>
           </a:p>
         </p:txBody>
@@ -18240,7 +18376,7 @@
       </p:sp>
       <p:pic xmlns:a="http://schemas.openxmlformats.org/drawingml/2006/main" xmlns:r="http://schemas.openxmlformats.org/officeDocument/2006/relationships">
         <p:nvPicPr>
-          <p:cNvPr id="16" name="Figur: Spänningsdelare: 18 V över 1 kilohm och " descr="Spänningsdelare: 18 V över 1 kilohm och 2 kilohm med en last på 2 kilohm; utspänningen 9 V"/>
+          <p:cNvPr id="16" name="Figur: Spänningsdelare: 18 V över 2 kilohm och " descr="Spänningsdelare: 18 V över 2 kilohm och 2 kilohm med en last på 2 kilohm; utspänningen 6 V"/>
           <p:cNvPicPr>
             <a:picLocks noChangeAspect="1"/>
           </p:cNvPicPr>

--- a/sjoskolan/vecka-45/aktuell/v45_03_Repetition_infor_tentamen_elev.pptx
+++ b/sjoskolan/vecka-45/aktuell/v45_03_Repetition_infor_tentamen_elev.pptx
@@ -3846,7 +3846,73 @@
                 <a:ea typeface="Calibri"/>
                 <a:cs typeface="Calibri"/>
               </a:rPr>
-              <a:t>Pᵢₙ = Pᵤₜ/η     E = Pᵢₙ · t</a:t>
+              <a:t>P</a:t>
+            </a:r>
+            <a:r>
+              <a:rPr sz="2400" b="1" baseline="-25000">
+                <a:solidFill>
+                  <a:srgbClr val="064F91"/>
+                </a:solidFill>
+                <a:latin typeface="Calibri"/>
+                <a:ea typeface="Calibri"/>
+                <a:cs typeface="Calibri"/>
+              </a:rPr>
+              <a:t>in</a:t>
+            </a:r>
+            <a:r>
+              <a:rPr sz="2400" b="1">
+                <a:solidFill>
+                  <a:srgbClr val="064F91"/>
+                </a:solidFill>
+                <a:latin typeface="Calibri"/>
+                <a:ea typeface="Calibri"/>
+                <a:cs typeface="Calibri"/>
+              </a:rPr>
+              <a:t> = P</a:t>
+            </a:r>
+            <a:r>
+              <a:rPr sz="2400" b="1" baseline="-25000">
+                <a:solidFill>
+                  <a:srgbClr val="064F91"/>
+                </a:solidFill>
+                <a:latin typeface="Calibri"/>
+                <a:ea typeface="Calibri"/>
+                <a:cs typeface="Calibri"/>
+              </a:rPr>
+              <a:t>ut</a:t>
+            </a:r>
+            <a:r>
+              <a:rPr sz="2400" b="1">
+                <a:solidFill>
+                  <a:srgbClr val="064F91"/>
+                </a:solidFill>
+                <a:latin typeface="Calibri"/>
+                <a:ea typeface="Calibri"/>
+                <a:cs typeface="Calibri"/>
+              </a:rPr>
+              <a:t>/η; E = P</a:t>
+            </a:r>
+            <a:r>
+              <a:rPr sz="2400" b="1" baseline="-25000">
+                <a:solidFill>
+                  <a:srgbClr val="064F91"/>
+                </a:solidFill>
+                <a:latin typeface="Calibri"/>
+                <a:ea typeface="Calibri"/>
+                <a:cs typeface="Calibri"/>
+              </a:rPr>
+              <a:t>in</a:t>
+            </a:r>
+            <a:r>
+              <a:rPr sz="2400" b="1">
+                <a:solidFill>
+                  <a:srgbClr val="064F91"/>
+                </a:solidFill>
+                <a:latin typeface="Calibri"/>
+                <a:ea typeface="Calibri"/>
+                <a:cs typeface="Calibri"/>
+              </a:rPr>
+              <a:t> · t</a:t>
             </a:r>
           </a:p>
         </p:txBody>
@@ -3903,7 +3969,29 @@
                 <a:ea typeface="Calibri"/>
                 <a:cs typeface="Calibri"/>
               </a:rPr>
-              <a:t>Pᵤₜ är mekanisk uteffekt. η som decimal ger elektrisk inmatning. kW · h ger kWh.</a:t>
+              <a:t>P</a:t>
+            </a:r>
+            <a:r>
+              <a:rPr sz="2100" b="0" baseline="-25000">
+                <a:solidFill>
+                  <a:srgbClr val="111111"/>
+                </a:solidFill>
+                <a:latin typeface="Calibri"/>
+                <a:ea typeface="Calibri"/>
+                <a:cs typeface="Calibri"/>
+              </a:rPr>
+              <a:t>ut</a:t>
+            </a:r>
+            <a:r>
+              <a:rPr sz="2100" b="0">
+                <a:solidFill>
+                  <a:srgbClr val="111111"/>
+                </a:solidFill>
+                <a:latin typeface="Calibri"/>
+                <a:ea typeface="Calibri"/>
+                <a:cs typeface="Calibri"/>
+              </a:rPr>
+              <a:t> är effekten på axeln. Dela med η som decimaltal för att få den tillförda effekten.</a:t>
             </a:r>
           </a:p>
         </p:txBody>
@@ -3960,7 +4048,29 @@
                 <a:ea typeface="Calibri"/>
                 <a:cs typeface="Calibri"/>
               </a:rPr>
-              <a:t>Förutsättningar: Pᵤₜ = 400 W, η = 80 % = 0,80 och drifttid 3 h. Konstant drift antas.</a:t>
+              <a:t>Förutsättningar: P</a:t>
+            </a:r>
+            <a:r>
+              <a:rPr sz="2025" b="0" baseline="-25000">
+                <a:solidFill>
+                  <a:srgbClr val="111111"/>
+                </a:solidFill>
+                <a:latin typeface="Calibri"/>
+                <a:ea typeface="Calibri"/>
+                <a:cs typeface="Calibri"/>
+              </a:rPr>
+              <a:t>ut</a:t>
+            </a:r>
+            <a:r>
+              <a:rPr sz="2025" b="0">
+                <a:solidFill>
+                  <a:srgbClr val="111111"/>
+                </a:solidFill>
+                <a:latin typeface="Calibri"/>
+                <a:ea typeface="Calibri"/>
+                <a:cs typeface="Calibri"/>
+              </a:rPr>
+              <a:t> = 400 W, η = 80 % = 0,80 och drifttiden 3 h. Driften är jämn.</a:t>
             </a:r>
           </a:p>
         </p:txBody>
@@ -4017,7 +4127,7 @@
                 <a:ea typeface="Calibri"/>
                 <a:cs typeface="Calibri"/>
               </a:rPr>
-              <a:t>Arbetsgång: Räkna inmatning först. Omvandla W till kW och multiplicera därefter med timmar.</a:t>
+              <a:t>Arbetsgång: Gör om W till kW och multiplicera med tiden – kW · h ger kWh.</a:t>
             </a:r>
           </a:p>
         </p:txBody>
@@ -4294,7 +4404,7 @@
                 <a:ea typeface="Calibri"/>
                 <a:cs typeface="Calibri"/>
               </a:rPr>
-              <a:t>En motor ger 400 W mekaniskt med η = 80 %. Den körs i 3 h. Beräkna elektrisk inmatning och energi.</a:t>
+              <a:t>En motor ger 400 W på axeln med η = 80 % och går i 3 h. Beräkna den tillförda elektriska effekten och energin.</a:t>
             </a:r>
           </a:p>
         </p:txBody>
@@ -4570,7 +4680,40 @@
                 <a:ea typeface="Calibri"/>
                 <a:cs typeface="Calibri"/>
               </a:rPr>
-              <a:t>ΣIin = ΣIut</a:t>
+              <a:t>ΣI</a:t>
+            </a:r>
+            <a:r>
+              <a:rPr sz="2400" b="1" baseline="-25000">
+                <a:solidFill>
+                  <a:srgbClr val="064F91"/>
+                </a:solidFill>
+                <a:latin typeface="Calibri"/>
+                <a:ea typeface="Calibri"/>
+                <a:cs typeface="Calibri"/>
+              </a:rPr>
+              <a:t>in</a:t>
+            </a:r>
+            <a:r>
+              <a:rPr sz="2400" b="1">
+                <a:solidFill>
+                  <a:srgbClr val="064F91"/>
+                </a:solidFill>
+                <a:latin typeface="Calibri"/>
+                <a:ea typeface="Calibri"/>
+                <a:cs typeface="Calibri"/>
+              </a:rPr>
+              <a:t> = ΣI</a:t>
+            </a:r>
+            <a:r>
+              <a:rPr sz="2400" b="1" baseline="-25000">
+                <a:solidFill>
+                  <a:srgbClr val="064F91"/>
+                </a:solidFill>
+                <a:latin typeface="Calibri"/>
+                <a:ea typeface="Calibri"/>
+                <a:cs typeface="Calibri"/>
+              </a:rPr>
+              <a:t>ut</a:t>
             </a:r>
           </a:p>
         </p:txBody>
@@ -4627,7 +4770,7 @@
                 <a:ea typeface="Calibri"/>
                 <a:cs typeface="Calibri"/>
               </a:rPr>
-              <a:t>Summan av strömmar in i noden är lika med summan ut vid stationär drift.</a:t>
+              <a:t>Strömmen in i noden är lika med strömmen ut.</a:t>
             </a:r>
           </a:p>
         </p:txBody>
@@ -4684,7 +4827,29 @@
                 <a:ea typeface="Calibri"/>
                 <a:cs typeface="Calibri"/>
               </a:rPr>
-              <a:t>Förutsättningar: 4,0 A och 1,5 A in. 2,0 A och Iₓ ut. Alla riktningar är givna.</a:t>
+              <a:t>Förutsättningar: 4,0 A och 1,5 A in, 2,0 A och I</a:t>
+            </a:r>
+            <a:r>
+              <a:rPr sz="2025" b="0" baseline="-25000">
+                <a:solidFill>
+                  <a:srgbClr val="111111"/>
+                </a:solidFill>
+                <a:latin typeface="Calibri"/>
+                <a:ea typeface="Calibri"/>
+                <a:cs typeface="Calibri"/>
+              </a:rPr>
+              <a:t>x</a:t>
+            </a:r>
+            <a:r>
+              <a:rPr sz="2025" b="0">
+                <a:solidFill>
+                  <a:srgbClr val="111111"/>
+                </a:solidFill>
+                <a:latin typeface="Calibri"/>
+                <a:ea typeface="Calibri"/>
+                <a:cs typeface="Calibri"/>
+              </a:rPr>
+              <a:t> ut. Alla riktningar är givna.</a:t>
             </a:r>
           </a:p>
         </p:txBody>
@@ -4741,7 +4906,7 @@
                 <a:ea typeface="Calibri"/>
                 <a:cs typeface="Calibri"/>
               </a:rPr>
-              <a:t>Arbetsgång: Skriv nodekvationen. Summera kända inströmmar och dra bort känd utström.</a:t>
+              <a:t>Arbetsgång: Skriv upp ekvationen, lägg ihop strömmarna in och dra bort den kända strömmen ut.</a:t>
             </a:r>
           </a:p>
         </p:txBody>
@@ -4960,7 +5125,7 @@
                 <a:ea typeface="Calibri"/>
                 <a:cs typeface="Calibri"/>
               </a:rPr>
-              <a:t>Nodlag</a:t>
+              <a:t>Strömlagen</a:t>
             </a:r>
           </a:p>
         </p:txBody>
@@ -5629,7 +5794,7 @@
                 <a:ea typeface="Calibri"/>
                 <a:cs typeface="Calibri"/>
               </a:rPr>
-              <a:t> ersätter den nedre resistorn parallellt med lasten. Resistansenheten måste vara gemensam.</a:t>
+              <a:t> ersätter den nedre resistorn och lasten, som ligger parallellt.</a:t>
             </a:r>
           </a:p>
         </p:txBody>
@@ -5686,7 +5851,18 @@
                 <a:ea typeface="Calibri"/>
                 <a:cs typeface="Calibri"/>
               </a:rPr>
-              <a:t>Förutsättningar: </a:t>
+              <a:t>Förutsättningar: U</a:t>
+            </a:r>
+            <a:r>
+              <a:rPr sz="2025" b="0" baseline="-25000">
+                <a:solidFill>
+                  <a:srgbClr val="111111"/>
+                </a:solidFill>
+                <a:latin typeface="Calibri"/>
+                <a:ea typeface="Calibri"/>
+                <a:cs typeface="Calibri"/>
+              </a:rPr>
+              <a:t>in</a:t>
             </a:r>
             <a:r>
               <a:rPr sz="2025" b="0">
@@ -5697,7 +5873,7 @@
                 <a:ea typeface="Calibri"/>
                 <a:cs typeface="Calibri"/>
               </a:rPr>
-              <a:t>U</a:t>
+              <a:t> = 24 V, R</a:t>
             </a:r>
             <a:r>
               <a:rPr sz="2025" b="0" baseline="-25000">
@@ -5708,7 +5884,7 @@
                 <a:ea typeface="Calibri"/>
                 <a:cs typeface="Calibri"/>
               </a:rPr>
-              <a:t>in</a:t>
+              <a:t>1</a:t>
             </a:r>
             <a:r>
               <a:rPr sz="2025" b="0">
@@ -5719,7 +5895,18 @@
                 <a:ea typeface="Calibri"/>
                 <a:cs typeface="Calibri"/>
               </a:rPr>
-              <a:t> = 24 V, R₁ = 2 kΩ, R₂ = </a:t>
+              <a:t> = 2 kΩ, R</a:t>
+            </a:r>
+            <a:r>
+              <a:rPr sz="2025" b="0" baseline="-25000">
+                <a:solidFill>
+                  <a:srgbClr val="111111"/>
+                </a:solidFill>
+                <a:latin typeface="Calibri"/>
+                <a:ea typeface="Calibri"/>
+                <a:cs typeface="Calibri"/>
+              </a:rPr>
+              <a:t>2</a:t>
             </a:r>
             <a:r>
               <a:rPr sz="2025" b="0">
@@ -5730,7 +5917,7 @@
                 <a:ea typeface="Calibri"/>
                 <a:cs typeface="Calibri"/>
               </a:rPr>
-              <a:t>R</a:t>
+              <a:t> = R</a:t>
             </a:r>
             <a:r>
               <a:rPr sz="2025" b="0" baseline="-25000">
@@ -5752,7 +5939,7 @@
                 <a:ea typeface="Calibri"/>
                 <a:cs typeface="Calibri"/>
               </a:rPr>
-              <a:t> = 4 kΩ. Ideal källa och ohmska resistorer.</a:t>
+              <a:t> = 4 kΩ. Ideal källa och resistorer med konstant resistans.</a:t>
             </a:r>
           </a:p>
         </p:txBody>
@@ -5809,7 +5996,29 @@
                 <a:ea typeface="Calibri"/>
                 <a:cs typeface="Calibri"/>
               </a:rPr>
-              <a:t>Arbetsgång: Förenkla parallellgrenen först. Använd den nya resistansen i spänningsdelaren.</a:t>
+              <a:t>Arbetsgång: Räkna alla resistanser i samma enhet. Förenkla parallellkopplingen först och använd sedan R</a:t>
+            </a:r>
+            <a:r>
+              <a:rPr sz="2025" b="0" baseline="-25000">
+                <a:solidFill>
+                  <a:srgbClr val="111111"/>
+                </a:solidFill>
+                <a:latin typeface="Calibri"/>
+                <a:ea typeface="Calibri"/>
+                <a:cs typeface="Calibri"/>
+              </a:rPr>
+              <a:t>p</a:t>
+            </a:r>
+            <a:r>
+              <a:rPr sz="2025" b="0">
+                <a:solidFill>
+                  <a:srgbClr val="111111"/>
+                </a:solidFill>
+                <a:latin typeface="Calibri"/>
+                <a:ea typeface="Calibri"/>
+                <a:cs typeface="Calibri"/>
+              </a:rPr>
+              <a:t> i delningsformeln.</a:t>
             </a:r>
           </a:p>
         </p:txBody>
@@ -6386,7 +6595,18 @@
                 <a:ea typeface="Calibri"/>
                 <a:cs typeface="Calibri"/>
               </a:rPr>
-              <a:t>û = √2 · </a:t>
+              <a:t>û = √2 · U</a:t>
+            </a:r>
+            <a:r>
+              <a:rPr sz="2400" b="1" baseline="-25000">
+                <a:solidFill>
+                  <a:srgbClr val="064F91"/>
+                </a:solidFill>
+                <a:latin typeface="Calibri"/>
+                <a:ea typeface="Calibri"/>
+                <a:cs typeface="Calibri"/>
+              </a:rPr>
+              <a:t>rms</a:t>
             </a:r>
             <a:r>
               <a:rPr sz="2400" b="1">
@@ -6397,29 +6617,7 @@
                 <a:ea typeface="Calibri"/>
                 <a:cs typeface="Calibri"/>
               </a:rPr>
-              <a:t>U</a:t>
-            </a:r>
-            <a:r>
-              <a:rPr sz="2400" b="1" baseline="-25000">
-                <a:solidFill>
-                  <a:srgbClr val="064F91"/>
-                </a:solidFill>
-                <a:latin typeface="Calibri"/>
-                <a:ea typeface="Calibri"/>
-                <a:cs typeface="Calibri"/>
-              </a:rPr>
-              <a:t>rms</a:t>
-            </a:r>
-            <a:r>
-              <a:rPr sz="2400" b="1">
-                <a:solidFill>
-                  <a:srgbClr val="064F91"/>
-                </a:solidFill>
-                <a:latin typeface="Calibri"/>
-                <a:ea typeface="Calibri"/>
-                <a:cs typeface="Calibri"/>
-              </a:rPr>
-              <a:t>     T = 1/f</a:t>
+              <a:t>; T = 1/f</a:t>
             </a:r>
           </a:p>
         </p:txBody>
@@ -6533,18 +6731,7 @@
                 <a:ea typeface="Calibri"/>
                 <a:cs typeface="Calibri"/>
               </a:rPr>
-              <a:t>Förutsättningar: Ren sinus utan DC-komponent, </a:t>
-            </a:r>
-            <a:r>
-              <a:rPr sz="2025" b="0">
-                <a:solidFill>
-                  <a:srgbClr val="111111"/>
-                </a:solidFill>
-                <a:latin typeface="Calibri"/>
-                <a:ea typeface="Calibri"/>
-                <a:cs typeface="Calibri"/>
-              </a:rPr>
-              <a:t>U</a:t>
+              <a:t>Förutsättningar: Ren sinus utan likspänningsdel, U</a:t>
             </a:r>
             <a:r>
               <a:rPr sz="2025" b="0" baseline="-25000">
@@ -6900,7 +7087,7 @@
                 <a:ea typeface="Calibri"/>
                 <a:cs typeface="Calibri"/>
               </a:rPr>
-              <a:t>En sinus har 24 V RMS och frekvensen 60 Hz. Beräkna toppvärde och period.</a:t>
+              <a:t>En sinusspänning har effektivvärdet 24 V och frekvensen 60 Hz. Beräkna toppvärde och periodtid.</a:t>
             </a:r>
           </a:p>
         </p:txBody>
@@ -7176,29 +7363,7 @@
                 <a:ea typeface="Calibri"/>
                 <a:cs typeface="Calibri"/>
               </a:rPr>
-              <a:t>|Z| = √(R² + X</a:t>
-            </a:r>
-            <a:r>
-              <a:rPr sz="2400" b="1" baseline="-25000">
-                <a:solidFill>
-                  <a:srgbClr val="064F91"/>
-                </a:solidFill>
-                <a:latin typeface="Calibri"/>
-                <a:ea typeface="Calibri"/>
-                <a:cs typeface="Calibri"/>
-              </a:rPr>
-              <a:t>L</a:t>
-            </a:r>
-            <a:r>
-              <a:rPr sz="2400" b="1">
-                <a:solidFill>
-                  <a:srgbClr val="064F91"/>
-                </a:solidFill>
-                <a:latin typeface="Calibri"/>
-                <a:ea typeface="Calibri"/>
-                <a:cs typeface="Calibri"/>
-              </a:rPr>
-              <a:t>²)</a:t>
+              <a:t>|Z| = √(R² + XL²)</a:t>
             </a:r>
           </a:p>
           <a:p xmlns:a="http://schemas.openxmlformats.org/drawingml/2006/main">
@@ -7221,7 +7386,7 @@
                 <a:ea typeface="Calibri"/>
                 <a:cs typeface="Calibri"/>
               </a:rPr>
-              <a:t>I = U/|Z|     cos φ = R/|Z|</a:t>
+              <a:t>I = U/|Z|; cos φ = R/|Z|</a:t>
             </a:r>
           </a:p>
         </p:txBody>
@@ -7278,29 +7443,7 @@
                 <a:ea typeface="Calibri"/>
                 <a:cs typeface="Calibri"/>
               </a:rPr>
-              <a:t>R är resistiv del och X</a:t>
-            </a:r>
-            <a:r>
-              <a:rPr sz="2100" b="0" baseline="-25000">
-                <a:solidFill>
-                  <a:srgbClr val="111111"/>
-                </a:solidFill>
-                <a:latin typeface="Calibri"/>
-                <a:ea typeface="Calibri"/>
-                <a:cs typeface="Calibri"/>
-              </a:rPr>
-              <a:t>L</a:t>
-            </a:r>
-            <a:r>
-              <a:rPr sz="2100" b="0">
-                <a:solidFill>
-                  <a:srgbClr val="111111"/>
-                </a:solidFill>
-                <a:latin typeface="Calibri"/>
-                <a:ea typeface="Calibri"/>
-                <a:cs typeface="Calibri"/>
-              </a:rPr>
-              <a:t> induktiv del av serieimpedansen. U och I anges som RMS.</a:t>
+              <a:t>R är den resistiva och XL den induktiva delen av impedansen. U och I är effektivvärden.</a:t>
             </a:r>
           </a:p>
         </p:txBody>
@@ -7357,29 +7500,7 @@
                 <a:ea typeface="Calibri"/>
                 <a:cs typeface="Calibri"/>
               </a:rPr>
-              <a:t>Förutsättningar: Serie-RL: R = 30 Ω, X</a:t>
-            </a:r>
-            <a:r>
-              <a:rPr sz="2025" b="0" baseline="-25000">
-                <a:solidFill>
-                  <a:srgbClr val="111111"/>
-                </a:solidFill>
-                <a:latin typeface="Calibri"/>
-                <a:ea typeface="Calibri"/>
-                <a:cs typeface="Calibri"/>
-              </a:rPr>
-              <a:t>L</a:t>
-            </a:r>
-            <a:r>
-              <a:rPr sz="2025" b="0">
-                <a:solidFill>
-                  <a:srgbClr val="111111"/>
-                </a:solidFill>
-                <a:latin typeface="Calibri"/>
-                <a:ea typeface="Calibri"/>
-                <a:cs typeface="Calibri"/>
-              </a:rPr>
-              <a:t> = 40 Ω och U = 100 V RMS.</a:t>
+              <a:t>Förutsättningar: RL i serie: R = 30 Ω, XL = 40 Ω och U = 100 V RMS.</a:t>
             </a:r>
           </a:p>
         </p:txBody>
@@ -7436,7 +7557,7 @@
                 <a:ea typeface="Calibri"/>
                 <a:cs typeface="Calibri"/>
               </a:rPr>
-              <a:t>Arbetsgång: Beräkna impedansens belopp. Använd det i båda kvoterna för ström och effektfaktor.</a:t>
+              <a:t>Arbetsgång: Räkna ut impedansen och använd den för både ström och effektfaktor.</a:t>
             </a:r>
           </a:p>
         </p:txBody>
@@ -7713,29 +7834,7 @@
                 <a:ea typeface="Calibri"/>
                 <a:cs typeface="Calibri"/>
               </a:rPr>
-              <a:t>R = 30 Ω och X</a:t>
-            </a:r>
-            <a:r>
-              <a:rPr sz="2400" b="0" baseline="-25000">
-                <a:solidFill>
-                  <a:srgbClr val="111111"/>
-                </a:solidFill>
-                <a:latin typeface="Calibri"/>
-                <a:ea typeface="Calibri"/>
-                <a:cs typeface="Calibri"/>
-              </a:rPr>
-              <a:t>L</a:t>
-            </a:r>
-            <a:r>
-              <a:rPr sz="2400" b="0">
-                <a:solidFill>
-                  <a:srgbClr val="111111"/>
-                </a:solidFill>
-                <a:latin typeface="Calibri"/>
-                <a:ea typeface="Calibri"/>
-                <a:cs typeface="Calibri"/>
-              </a:rPr>
-              <a:t> = 40 Ω i serie över 100 V RMS. Bestäm I och cos φ.</a:t>
+              <a:t>R = 30 Ω och XL = 40 Ω i serie över 100 V RMS. Bestäm I och cos φ.</a:t>
             </a:r>
           </a:p>
         </p:txBody>
@@ -10554,7 +10653,7 @@
                 <a:ea typeface="Calibri"/>
                 <a:cs typeface="Calibri"/>
               </a:rPr>
-              <a:t>P är total aktiv trefaseffekt i W. U</a:t>
+              <a:t>P är den totala aktiva effekten i W. U</a:t>
             </a:r>
             <a:r>
               <a:rPr sz="2100" b="0" baseline="-25000">
@@ -10598,7 +10697,7 @@
                 <a:ea typeface="Calibri"/>
                 <a:cs typeface="Calibri"/>
               </a:rPr>
-              <a:t> är linjevärden i V och A RMS.</a:t>
+              <a:t> är linjevärden.</a:t>
             </a:r>
           </a:p>
         </p:txBody>
@@ -10756,7 +10855,7 @@
                 <a:ea typeface="Calibri"/>
                 <a:cs typeface="Calibri"/>
               </a:rPr>
-              <a:t>Arbetsgång: Multiplicera faktorerna och omvandla W till kW. Använd inte grenspänning i denna formel.</a:t>
+              <a:t>Arbetsgång: Multiplicera faktorerna och gör om W till kW. Använd inte grenspänningen i den här formeln.</a:t>
             </a:r>
           </a:p>
         </p:txBody>
@@ -11033,7 +11132,7 @@
                 <a:ea typeface="Calibri"/>
                 <a:cs typeface="Calibri"/>
               </a:rPr>
-              <a:t>Symmetrisk trefas: U</a:t>
+              <a:t>En symmetrisk trefaslast har U</a:t>
             </a:r>
             <a:r>
               <a:rPr sz="2400" b="0" baseline="-25000">
@@ -11077,7 +11176,7 @@
                 <a:ea typeface="Calibri"/>
                 <a:cs typeface="Calibri"/>
               </a:rPr>
-              <a:t> = 8 A och PF = 0,80. Beräkna aktiv effekt.</a:t>
+              <a:t> = 8 A och PF = 0,80. Beräkna den aktiva effekten.</a:t>
             </a:r>
           </a:p>
         </p:txBody>
@@ -11410,7 +11509,7 @@
                 <a:ea typeface="Calibri"/>
                 <a:cs typeface="Calibri"/>
               </a:rPr>
-              <a:t>δ är felgränsens belopp. n siffror betyder n displaysteg, inte n decimaler.</a:t>
+              <a:t>δ är felgränsen. n siffror betyder n steg i sista siffran, inte n decimaler.</a:t>
             </a:r>
           </a:p>
         </p:txBody>
@@ -11467,7 +11566,7 @@
                 <a:ea typeface="Calibri"/>
                 <a:cs typeface="Calibri"/>
               </a:rPr>
-              <a:t>Förutsättningar: Visning 24,00 V, a = 1,0, n = 2 och upplösning 0,01 V.</a:t>
+              <a:t>Förutsättningar: Visat värde 24,00 V, a = 1,0, n = 2 och upplösning 0,01 V.</a:t>
             </a:r>
           </a:p>
         </p:txBody>
@@ -11524,7 +11623,7 @@
                 <a:ea typeface="Calibri"/>
                 <a:cs typeface="Calibri"/>
               </a:rPr>
-              <a:t>Arbetsgång: Räkna procentbidrag och sifferbidrag var för sig. Summera och skriv visning ± gräns.</a:t>
+              <a:t>Arbetsgång: Räkna procentdelen och siffrornas del var för sig, lägg ihop och skriv svaret som visat värde ± δ.</a:t>
             </a:r>
           </a:p>
         </p:txBody>
@@ -11801,7 +11900,7 @@
                 <a:ea typeface="Calibri"/>
                 <a:cs typeface="Calibri"/>
               </a:rPr>
-              <a:t>24,00 V visas med specifikation ±(1,0 % + 2 siffror), upplösning 0,01 V. Beräkna gränsen.</a:t>
+              <a:t>Ett instrument visar 24,00 V. Specifikationen är ±(1,0 % + 2 siffror) och upplösningen 0,01 V. Beräkna felgränsen.</a:t>
             </a:r>
           </a:p>
         </p:txBody>
@@ -12134,7 +12233,7 @@
                 <a:ea typeface="Calibri"/>
                 <a:cs typeface="Calibri"/>
               </a:rPr>
-              <a:t>En batterireserv kan mata delar även när huvudmatningen hanterats.</a:t>
+              <a:t>En batterireserv kan mata delar av anläggningen även när huvudmatningen är frånkopplad.</a:t>
             </a:r>
           </a:p>
         </p:txBody>
@@ -12191,7 +12290,7 @@
                 <a:ea typeface="Calibri"/>
                 <a:cs typeface="Calibri"/>
               </a:rPr>
-              <a:t>Förutsättningar: Arbetsplanen missar batterireserven. Säker frånvaro av energi är därför inte verifierad för hela området.</a:t>
+              <a:t>Förutsättningar: Batterireserven saknas i arbetsplanen. Det är därför inte kontrollerat att hela området är spänningslöst.</a:t>
             </a:r>
           </a:p>
         </p:txBody>
@@ -12248,7 +12347,7 @@
                 <a:ea typeface="Calibri"/>
                 <a:cs typeface="Calibri"/>
               </a:rPr>
-              <a:t>Arbetsgång: Beskriv brist, möjlig följd och första beslut. Ange vad som behöver kompletteras före start.</a:t>
+              <a:t>Arbetsgång: Beskriv bristen, en möjlig följd och det första beslutet, och ange vad som måste läggas till innan arbetet börjar.</a:t>
             </a:r>
           </a:p>
         </p:txBody>
@@ -13039,7 +13138,7 @@
                 <a:ea typeface="Calibri"/>
                 <a:cs typeface="Calibri"/>
               </a:rPr>
-              <a:t>Arbetsplanen hanterar huvudmatningen men missar batterireserven. Ange brist, möjlig konsekvens och första beslut.</a:t>
+              <a:t>Arbetsplanen tar med huvudmatningen men har missat batterireserven. Ange bristen, en möjlig konsekvens och det första beslutet.</a:t>
             </a:r>
           </a:p>
         </p:txBody>
@@ -13372,7 +13471,7 @@
                 <a:ea typeface="Calibri"/>
                 <a:cs typeface="Calibri"/>
               </a:rPr>
-              <a:t>NO-hållkontakten ligger parallellt med START och ska sluta när K1 drar.</a:t>
+              <a:t>Hållkontakten (NO) ligger parallellt med START och ska sluta när K1 drar.</a:t>
             </a:r>
           </a:p>
         </p:txBody>
@@ -13429,7 +13528,7 @@
                 <a:ea typeface="Calibri"/>
                 <a:cs typeface="Calibri"/>
               </a:rPr>
-              <a:t>Förutsättningar: K1 drar under START, släpper efteråt och har rätt matningsspänning under start.</a:t>
+              <a:t>Förutsättningar: K1 drar när START hålls in och släpper efteråt. Matningsspänningen är rätt under starten.</a:t>
             </a:r>
           </a:p>
         </p:txBody>
@@ -13486,7 +13585,7 @@
                 <a:ea typeface="Calibri"/>
                 <a:cs typeface="Calibri"/>
               </a:rPr>
-              <a:t>Arbetsgång: Föreslå hypotes i hållvägen och en kontroll som kan pröva den enligt säker mätplan.</a:t>
+              <a:t>Arbetsgång: Föreslå en orsak i hållvägen och en kontroll som prövar den, enligt en säker mätplan.</a:t>
             </a:r>
           </a:p>
         </p:txBody>
@@ -13763,7 +13862,7 @@
                 <a:ea typeface="Calibri"/>
                 <a:cs typeface="Calibri"/>
               </a:rPr>
-              <a:t>K1 drar med START men släpper vid släpp. Matningen håller rätt spänning under start. Föreslå en hypotes och nästa kontroll.</a:t>
+              <a:t>K1 drar när START trycks in men släpper när knappen släpps. Matningen har rätt spänning under starten. Föreslå en tänkbar orsak och nästa kontroll.</a:t>
             </a:r>
           </a:p>
         </p:txBody>
@@ -14184,7 +14283,7 @@
                 <a:ea typeface="Calibri"/>
                 <a:cs typeface="Calibri"/>
               </a:rPr>
-              <a:t>Slingresistans omfattar fram- och returväg mellan mätpunkterna.</a:t>
+              <a:t>Slingresistansen är resistansen i fram- och returledaren tillsammans.</a:t>
             </a:r>
           </a:p>
         </p:txBody>
@@ -14241,7 +14340,7 @@
                 <a:ea typeface="Calibri"/>
                 <a:cs typeface="Calibri"/>
               </a:rPr>
-              <a:t>Förutsättningar: Källan håller 24 V. Vid 4 A är lastspänningen 20 V före och 23,6 V efter. Samma mätpunkter antas.</a:t>
+              <a:t>Förutsättningar: Källan håller 24 V. Vid 4 A är spänningen vid lasten 20 V före och 23,6 V efter. Mätpunkterna är desamma.</a:t>
             </a:r>
           </a:p>
         </p:txBody>
@@ -14298,7 +14397,7 @@
                 <a:ea typeface="Calibri"/>
                 <a:cs typeface="Calibri"/>
               </a:rPr>
-              <a:t>Arbetsgång: Beräkna spänningsfallet och resistansen i båda fallen. Jämför vid samma ström.</a:t>
+              <a:t>Arbetsgång: Räkna ut spänningsfallet och resistansen före och efter, och jämför.</a:t>
             </a:r>
           </a:p>
         </p:txBody>
@@ -14575,7 +14674,7 @@
                 <a:ea typeface="Calibri"/>
                 <a:cs typeface="Calibri"/>
               </a:rPr>
-              <a:t>En 24 V-källa matar en last. Vid 4 A mäts 20 V vid lasten. Efter åtgärd mäts 23,6 V vid samma ström. Beräkna slingresistans före och efter.</a:t>
+              <a:t>En 24 V-källa matar en last. Vid 4 A mäts 20 V vid lasten. Efter en åtgärd mäts 23,6 V vid samma ström. Beräkna slingresistansen före och efter.</a:t>
             </a:r>
           </a:p>
         </p:txBody>

--- a/sjoskolan/vecka-45/aktuell/v45_03_Repetition_infor_tentamen_elev.pptx
+++ b/sjoskolan/vecka-45/aktuell/v45_03_Repetition_infor_tentamen_elev.pptx
@@ -7443,7 +7443,29 @@
                 <a:ea typeface="Calibri"/>
                 <a:cs typeface="Calibri"/>
               </a:rPr>
-              <a:t>R är den resistiva och XL den induktiva delen av impedansen. U och I är effektivvärden.</a:t>
+              <a:t>R är den resistiva och X</a:t>
+            </a:r>
+            <a:r>
+              <a:rPr sz="2100" b="0" baseline="-25000">
+                <a:solidFill>
+                  <a:srgbClr val="111111"/>
+                </a:solidFill>
+                <a:latin typeface="Calibri"/>
+                <a:ea typeface="Calibri"/>
+                <a:cs typeface="Calibri"/>
+              </a:rPr>
+              <a:t>L</a:t>
+            </a:r>
+            <a:r>
+              <a:rPr sz="2100" b="0">
+                <a:solidFill>
+                  <a:srgbClr val="111111"/>
+                </a:solidFill>
+                <a:latin typeface="Calibri"/>
+                <a:ea typeface="Calibri"/>
+                <a:cs typeface="Calibri"/>
+              </a:rPr>
+              <a:t> den induktiva delen av impedansen. U och I är effektivvärden.</a:t>
             </a:r>
           </a:p>
         </p:txBody>
@@ -7500,7 +7522,29 @@
                 <a:ea typeface="Calibri"/>
                 <a:cs typeface="Calibri"/>
               </a:rPr>
-              <a:t>Förutsättningar: RL i serie: R = 30 Ω, XL = 40 Ω och U = 100 V RMS.</a:t>
+              <a:t>Förutsättningar: RL i serie: R = 30 Ω, X</a:t>
+            </a:r>
+            <a:r>
+              <a:rPr sz="2025" b="0" baseline="-25000">
+                <a:solidFill>
+                  <a:srgbClr val="111111"/>
+                </a:solidFill>
+                <a:latin typeface="Calibri"/>
+                <a:ea typeface="Calibri"/>
+                <a:cs typeface="Calibri"/>
+              </a:rPr>
+              <a:t>L</a:t>
+            </a:r>
+            <a:r>
+              <a:rPr sz="2025" b="0">
+                <a:solidFill>
+                  <a:srgbClr val="111111"/>
+                </a:solidFill>
+                <a:latin typeface="Calibri"/>
+                <a:ea typeface="Calibri"/>
+                <a:cs typeface="Calibri"/>
+              </a:rPr>
+              <a:t> = 40 Ω och U = 100 V RMS.</a:t>
             </a:r>
           </a:p>
         </p:txBody>
@@ -7834,7 +7878,29 @@
                 <a:ea typeface="Calibri"/>
                 <a:cs typeface="Calibri"/>
               </a:rPr>
-              <a:t>R = 30 Ω och XL = 40 Ω i serie över 100 V RMS. Bestäm I och cos φ.</a:t>
+              <a:t>R = 30 Ω och X</a:t>
+            </a:r>
+            <a:r>
+              <a:rPr sz="2400" b="0" baseline="-25000">
+                <a:solidFill>
+                  <a:srgbClr val="111111"/>
+                </a:solidFill>
+                <a:latin typeface="Calibri"/>
+                <a:ea typeface="Calibri"/>
+                <a:cs typeface="Calibri"/>
+              </a:rPr>
+              <a:t>L</a:t>
+            </a:r>
+            <a:r>
+              <a:rPr sz="2400" b="0">
+                <a:solidFill>
+                  <a:srgbClr val="111111"/>
+                </a:solidFill>
+                <a:latin typeface="Calibri"/>
+                <a:ea typeface="Calibri"/>
+                <a:cs typeface="Calibri"/>
+              </a:rPr>
+              <a:t> = 40 Ω i serie över 100 V RMS. Bestäm I och cos φ.</a:t>
             </a:r>
           </a:p>
         </p:txBody>

--- a/sjoskolan/vecka-45/aktuell/v45_03_Repetition_infor_tentamen_elev.pptx
+++ b/sjoskolan/vecka-45/aktuell/v45_03_Repetition_infor_tentamen_elev.pptx
@@ -6606,7 +6606,7 @@
                 <a:ea typeface="Calibri"/>
                 <a:cs typeface="Calibri"/>
               </a:rPr>
-              <a:t>rms</a:t>
+              <a:t>RMS</a:t>
             </a:r>
             <a:r>
               <a:rPr sz="2400" b="1">
@@ -6742,7 +6742,7 @@
                 <a:ea typeface="Calibri"/>
                 <a:cs typeface="Calibri"/>
               </a:rPr>
-              <a:t>rms</a:t>
+              <a:t>RMS</a:t>
             </a:r>
             <a:r>
               <a:rPr sz="2025" b="0">

--- a/sjoskolan/vecka-45/aktuell/v45_03_Repetition_infor_tentamen_elev.pptx
+++ b/sjoskolan/vecka-45/aktuell/v45_03_Repetition_infor_tentamen_elev.pptx
@@ -7363,7 +7363,29 @@
                 <a:ea typeface="Calibri"/>
                 <a:cs typeface="Calibri"/>
               </a:rPr>
-              <a:t>|Z| = √(R² + XL²)</a:t>
+              <a:t>|Z| = √(R² + X</a:t>
+            </a:r>
+            <a:r>
+              <a:rPr sz="2400" b="1" baseline="-25000">
+                <a:solidFill>
+                  <a:srgbClr val="064F91"/>
+                </a:solidFill>
+                <a:latin typeface="Calibri"/>
+                <a:ea typeface="Calibri"/>
+                <a:cs typeface="Calibri"/>
+              </a:rPr>
+              <a:t>L</a:t>
+            </a:r>
+            <a:r>
+              <a:rPr sz="2400" b="1">
+                <a:solidFill>
+                  <a:srgbClr val="064F91"/>
+                </a:solidFill>
+                <a:latin typeface="Calibri"/>
+                <a:ea typeface="Calibri"/>
+                <a:cs typeface="Calibri"/>
+              </a:rPr>
+              <a:t>²)</a:t>
             </a:r>
           </a:p>
           <a:p xmlns:a="http://schemas.openxmlformats.org/drawingml/2006/main">

--- a/sjoskolan/vecka-45/aktuell/v45_03_Repetition_infor_tentamen_elev.pptx
+++ b/sjoskolan/vecka-45/aktuell/v45_03_Repetition_infor_tentamen_elev.pptx
@@ -3789,7 +3789,7 @@
                 <a:ea typeface="Calibri"/>
                 <a:cs typeface="Calibri"/>
               </a:rPr>
-              <a:t>Stöd till övning 1</a:t>
+              <a:t>Stöd till övning 3.1</a:t>
             </a:r>
           </a:p>
         </p:txBody>
@@ -4288,7 +4288,7 @@
                 <a:ea typeface="Calibri"/>
                 <a:cs typeface="Calibri"/>
               </a:rPr>
-              <a:t>Övning 1</a:t>
+              <a:t>Övning 3.1</a:t>
             </a:r>
           </a:p>
         </p:txBody>
@@ -4623,7 +4623,7 @@
                 <a:ea typeface="Calibri"/>
                 <a:cs typeface="Calibri"/>
               </a:rPr>
-              <a:t>Stöd till övning 2</a:t>
+              <a:t>Stöd till övning 3.2</a:t>
             </a:r>
           </a:p>
         </p:txBody>
@@ -5067,7 +5067,7 @@
                 <a:ea typeface="Calibri"/>
                 <a:cs typeface="Calibri"/>
               </a:rPr>
-              <a:t>Övning 2</a:t>
+              <a:t>Övning 3.2</a:t>
             </a:r>
           </a:p>
         </p:txBody>
@@ -5426,7 +5426,7 @@
                 <a:ea typeface="Calibri"/>
                 <a:cs typeface="Calibri"/>
               </a:rPr>
-              <a:t>Stöd till övning 3</a:t>
+              <a:t>Stöd till övning 3.3</a:t>
             </a:r>
           </a:p>
         </p:txBody>
@@ -6179,7 +6179,7 @@
                 <a:ea typeface="Calibri"/>
                 <a:cs typeface="Calibri"/>
               </a:rPr>
-              <a:t>Övning 3</a:t>
+              <a:t>Övning 3.3</a:t>
             </a:r>
           </a:p>
         </p:txBody>
@@ -6538,7 +6538,7 @@
                 <a:ea typeface="Calibri"/>
                 <a:cs typeface="Calibri"/>
               </a:rPr>
-              <a:t>Stöd till övning 4</a:t>
+              <a:t>Stöd till övning 3.4</a:t>
             </a:r>
           </a:p>
         </p:txBody>
@@ -6971,7 +6971,7 @@
                 <a:ea typeface="Calibri"/>
                 <a:cs typeface="Calibri"/>
               </a:rPr>
-              <a:t>Övning 4</a:t>
+              <a:t>Övning 3.4</a:t>
             </a:r>
           </a:p>
         </p:txBody>
@@ -7306,7 +7306,7 @@
                 <a:ea typeface="Calibri"/>
                 <a:cs typeface="Calibri"/>
               </a:rPr>
-              <a:t>Stöd till övning 5</a:t>
+              <a:t>Stöd till övning 3.5</a:t>
             </a:r>
           </a:p>
         </p:txBody>
@@ -7784,7 +7784,7 @@
                 <a:ea typeface="Calibri"/>
                 <a:cs typeface="Calibri"/>
               </a:rPr>
-              <a:t>Övning 5</a:t>
+              <a:t>Övning 3.5</a:t>
             </a:r>
           </a:p>
         </p:txBody>
@@ -10583,7 +10583,7 @@
                 <a:ea typeface="Calibri"/>
                 <a:cs typeface="Calibri"/>
               </a:rPr>
-              <a:t>Stöd till övning 6</a:t>
+              <a:t>Stöd till övning 3.6</a:t>
             </a:r>
           </a:p>
         </p:txBody>
@@ -11104,7 +11104,7 @@
                 <a:ea typeface="Calibri"/>
                 <a:cs typeface="Calibri"/>
               </a:rPr>
-              <a:t>Övning 6</a:t>
+              <a:t>Övning 3.6</a:t>
             </a:r>
           </a:p>
         </p:txBody>
@@ -11483,7 +11483,7 @@
                 <a:ea typeface="Calibri"/>
                 <a:cs typeface="Calibri"/>
               </a:rPr>
-              <a:t>Stöd till övning 7</a:t>
+              <a:t>Stöd till övning 3.7</a:t>
             </a:r>
           </a:p>
         </p:txBody>
@@ -11872,7 +11872,7 @@
                 <a:ea typeface="Calibri"/>
                 <a:cs typeface="Calibri"/>
               </a:rPr>
-              <a:t>Övning 7</a:t>
+              <a:t>Övning 3.7</a:t>
             </a:r>
           </a:p>
         </p:txBody>
@@ -12207,7 +12207,7 @@
                 <a:ea typeface="Calibri"/>
                 <a:cs typeface="Calibri"/>
               </a:rPr>
-              <a:t>Stöd till övning 8</a:t>
+              <a:t>Stöd till övning 3.8</a:t>
             </a:r>
           </a:p>
         </p:txBody>
@@ -13110,7 +13110,7 @@
                 <a:ea typeface="Calibri"/>
                 <a:cs typeface="Calibri"/>
               </a:rPr>
-              <a:t>Övning 8</a:t>
+              <a:t>Övning 3.8</a:t>
             </a:r>
           </a:p>
         </p:txBody>
@@ -13445,7 +13445,7 @@
                 <a:ea typeface="Calibri"/>
                 <a:cs typeface="Calibri"/>
               </a:rPr>
-              <a:t>Stöd till övning 9</a:t>
+              <a:t>Stöd till övning 3.9</a:t>
             </a:r>
           </a:p>
         </p:txBody>
@@ -13834,7 +13834,7 @@
                 <a:ea typeface="Calibri"/>
                 <a:cs typeface="Calibri"/>
               </a:rPr>
-              <a:t>Övning 9</a:t>
+              <a:t>Övning 3.9</a:t>
             </a:r>
           </a:p>
         </p:txBody>
@@ -14169,7 +14169,7 @@
                 <a:ea typeface="Calibri"/>
                 <a:cs typeface="Calibri"/>
               </a:rPr>
-              <a:t>Stöd till övning 10</a:t>
+              <a:t>Stöd till övning 3.10</a:t>
             </a:r>
           </a:p>
         </p:txBody>
@@ -14646,7 +14646,7 @@
                 <a:ea typeface="Calibri"/>
                 <a:cs typeface="Calibri"/>
               </a:rPr>
-              <a:t>Övning 10</a:t>
+              <a:t>Övning 3.10</a:t>
             </a:r>
           </a:p>
         </p:txBody>

--- a/sjoskolan/vecka-45/aktuell/v45_03_Repetition_infor_tentamen_elev.pptx
+++ b/sjoskolan/vecka-45/aktuell/v45_03_Repetition_infor_tentamen_elev.pptx
@@ -8724,7 +8724,7 @@
                 <a:ea typeface="Calibri"/>
                 <a:cs typeface="Calibri"/>
               </a:rPr>
-              <a:t>Teori och exempel följs av övning 6–10.</a:t>
+              <a:t>Teori och exempel följs av övning 3.6–3.10.</a:t>
             </a:r>
           </a:p>
           <a:p xmlns:a="http://schemas.openxmlformats.org/drawingml/2006/main">
@@ -12732,7 +12732,7 @@
                 <a:ea typeface="Calibri"/>
                 <a:cs typeface="Calibri"/>
               </a:rPr>
-              <a:t>15 min övning 1, 2, 4, 5 min återkoppling</a:t>
+              <a:t>15 min övning 3.1, 3.2 och 3.4, 5 min återkoppling</a:t>
             </a:r>
           </a:p>
         </p:txBody>
@@ -12846,7 +12846,7 @@
                 <a:ea typeface="Calibri"/>
                 <a:cs typeface="Calibri"/>
               </a:rPr>
-              <a:t>20 min teori och exempel, 15 min övning 6, 7, 8</a:t>
+              <a:t>20 min teori och exempel, 15 min övning 3.6, 3.7 och 3.8</a:t>
             </a:r>
           </a:p>
           <a:p xmlns:a="http://schemas.openxmlformats.org/drawingml/2006/main">

--- a/sjoskolan/vecka-45/aktuell/v45_03_Repetition_infor_tentamen_elev.pptx
+++ b/sjoskolan/vecka-45/aktuell/v45_03_Repetition_infor_tentamen_elev.pptx
@@ -10842,7 +10842,7 @@
                 <a:ea typeface="Calibri"/>
                 <a:cs typeface="Calibri"/>
               </a:rPr>
-              <a:t>Förutsättningar: Symmetrisk trefas, U</a:t>
+              <a:t>Förutsättningar: Landström vid kaj, 50 Hz. Symmetrisk trefas, U</a:t>
             </a:r>
             <a:r>
               <a:rPr sz="2025" b="0" baseline="-25000">

--- a/sjoskolan/vecka-45/aktuell/v45_03_Repetition_infor_tentamen_elev.pptx
+++ b/sjoskolan/vecka-45/aktuell/v45_03_Repetition_infor_tentamen_elev.pptx
@@ -8788,7 +8788,7 @@
                 </a:solidFill>
                 <a:latin typeface="Calibri"/>
               </a:rPr>
-              <a:t>1. Läs del 5: teorin och de två exemplen.</a:t>
+              <a:t>1. Läs del 5: teorin och de två exemplen. Tryck på ”Jag har läst del 5” längst ned på sidan.</a:t>
             </a:r>
           </a:p>
           <a:p>

--- a/sjoskolan/vecka-45/aktuell/v45_03_Repetition_infor_tentamen_elev.pptx
+++ b/sjoskolan/vecka-45/aktuell/v45_03_Repetition_infor_tentamen_elev.pptx
@@ -8807,7 +8807,7 @@
                 </a:solidFill>
                 <a:latin typeface="Calibri"/>
               </a:rPr>
-              <a:t>2. Gör övning 3.6–3.10 på delsidan. Ledtrådar och facit finns där.</a:t>
+              <a:t>2. Gör övning 3.6–3.10 på delsidan för del 5. Ledtrådar och facit finns där.</a:t>
             </a:r>
           </a:p>
           <a:p>
@@ -8864,7 +8864,7 @@
                 </a:solidFill>
                 <a:latin typeface="Calibri"/>
               </a:rPr>
-              <a:t>Inlämningen och analysen av mätdata senast i dag, fredag 30 oktober.</a:t>
+              <a:t>Inlämningen, uppgift 1–4, senast i dag, fredag 30 oktober. Allt finns på veckosidan.</a:t>
             </a:r>
           </a:p>
         </p:txBody>

--- a/sjoskolan/vecka-45/aktuell/v45_03_Repetition_infor_tentamen_elev.pptx
+++ b/sjoskolan/vecka-45/aktuell/v45_03_Repetition_infor_tentamen_elev.pptx
@@ -7310,7 +7310,7 @@
                 </a:solidFill>
                 <a:latin typeface="Calibri"/>
               </a:rPr>
-              <a:t>3. Vi går igenom de uppgifter som flest behöver. Lösningarna finns på sidan under Visa lösning.</a:t>
+              <a:t>3. Vi går igenom metoden. Räkna först själv. Rätta sedan med ”Facit med lösningsgång” (PDF) i samma avsnitt.</a:t>
             </a:r>
           </a:p>
           <a:p>
